--- a/output_pptx/All_I_Have_Is_Christ.pptx
+++ b/output_pptx/All_I_Have_Is_Christ.pptx
@@ -3123,23 +3123,23 @@
         </p:nvSpPr>
         <p:spPr>
           <a:xfrm>
-            <a:off x="594360" y="1837944"/>
-            <a:ext cx="11002975" cy="685800"/>
-          </a:xfrm>
-          <a:prstGeom prst="rect">
-            <a:avLst/>
-          </a:prstGeom>
-          <a:noFill/>
-        </p:spPr>
-        <p:txBody>
-          <a:bodyPr wrap="square">
-            <a:spAutoFit/>
-          </a:bodyPr>
-          <a:lstStyle/>
-          <a:p>
-            <a:pPr algn="ctr"/>
-            <a:r>
-              <a:rPr sz="4400" b="1" i="0">
+            <a:off x="640080" y="1650492"/>
+            <a:ext cx="10911535" cy="731520"/>
+          </a:xfrm>
+          <a:prstGeom prst="rect">
+            <a:avLst/>
+          </a:prstGeom>
+          <a:noFill/>
+        </p:spPr>
+        <p:txBody>
+          <a:bodyPr wrap="square">
+            <a:spAutoFit/>
+          </a:bodyPr>
+          <a:lstStyle/>
+          <a:p>
+            <a:pPr algn="ctr"/>
+            <a:r>
+              <a:rPr sz="4800" b="1" i="0">
                 <a:solidFill>
                   <a:srgbClr val="FFFFFF"/>
                 </a:solidFill>
@@ -3158,8 +3158,8 @@
         </p:nvSpPr>
         <p:spPr>
           <a:xfrm>
-            <a:off x="594360" y="2560320"/>
-            <a:ext cx="11002975" cy="384048"/>
+            <a:off x="640080" y="2418588"/>
+            <a:ext cx="10911535" cy="365760"/>
           </a:xfrm>
           <a:prstGeom prst="rect">
             <a:avLst/>
@@ -3176,7 +3176,7 @@
             <a:r>
               <a:rPr sz="2400" b="0" i="1">
                 <a:solidFill>
-                  <a:srgbClr val="B4B4B4"/>
+                  <a:srgbClr val="AAAAAA"/>
                 </a:solidFill>
                 <a:latin typeface="Arial"/>
               </a:rPr>
@@ -3193,8 +3193,78 @@
         </p:nvSpPr>
         <p:spPr>
           <a:xfrm>
-            <a:off x="594360" y="2980944"/>
-            <a:ext cx="11002975" cy="347472"/>
+            <a:off x="640080" y="2985516"/>
+            <a:ext cx="10911535" cy="731520"/>
+          </a:xfrm>
+          <a:prstGeom prst="rect">
+            <a:avLst/>
+          </a:prstGeom>
+          <a:noFill/>
+        </p:spPr>
+        <p:txBody>
+          <a:bodyPr wrap="square">
+            <a:spAutoFit/>
+          </a:bodyPr>
+          <a:lstStyle/>
+          <a:p>
+            <a:pPr algn="ctr"/>
+            <a:r>
+              <a:rPr sz="4800" b="1" i="0">
+                <a:solidFill>
+                  <a:srgbClr val="FFFFFF"/>
+                </a:solidFill>
+                <a:latin typeface="Arial"/>
+              </a:rPr>
+              <a:t>背いて歩いた  滅びの - 道</a:t>
+            </a:r>
+          </a:p>
+        </p:txBody>
+      </p:sp>
+      <p:sp>
+        <p:nvSpPr>
+          <p:cNvPr id="5" name="TextBox 4"/>
+          <p:cNvSpPr txBox="1"/>
+          <p:nvPr/>
+        </p:nvSpPr>
+        <p:spPr>
+          <a:xfrm>
+            <a:off x="640080" y="3753612"/>
+            <a:ext cx="10911535" cy="365760"/>
+          </a:xfrm>
+          <a:prstGeom prst="rect">
+            <a:avLst/>
+          </a:prstGeom>
+          <a:noFill/>
+        </p:spPr>
+        <p:txBody>
+          <a:bodyPr wrap="square">
+            <a:spAutoFit/>
+          </a:bodyPr>
+          <a:lstStyle/>
+          <a:p>
+            <a:pPr algn="ctr"/>
+            <a:r>
+              <a:rPr sz="2400" b="0" i="1">
+                <a:solidFill>
+                  <a:srgbClr val="AAAAAA"/>
+                </a:solidFill>
+                <a:latin typeface="Arial"/>
+              </a:rPr>
+              <a:t>somuite aruita  horobi no michi</a:t>
+            </a:r>
+          </a:p>
+        </p:txBody>
+      </p:sp>
+      <p:sp>
+        <p:nvSpPr>
+          <p:cNvPr id="6" name="TextBox 5"/>
+          <p:cNvSpPr txBox="1"/>
+          <p:nvPr/>
+        </p:nvSpPr>
+        <p:spPr>
+          <a:xfrm>
+            <a:off x="640080" y="4530852"/>
+            <a:ext cx="10911535" cy="310896"/>
           </a:xfrm>
           <a:prstGeom prst="rect">
             <a:avLst/>
@@ -3211,81 +3281,11 @@
             <a:r>
               <a:rPr sz="2000" b="0" i="1">
                 <a:solidFill>
-                  <a:srgbClr val="8C8C8C"/>
-                </a:solidFill>
-                <a:latin typeface="Arial"/>
-              </a:rPr>
-              <a:t/>
-            </a:r>
-          </a:p>
-        </p:txBody>
-      </p:sp>
-      <p:sp>
-        <p:nvSpPr>
-          <p:cNvPr id="5" name="TextBox 4"/>
-          <p:cNvSpPr txBox="1"/>
-          <p:nvPr/>
-        </p:nvSpPr>
-        <p:spPr>
-          <a:xfrm>
-            <a:off x="594360" y="3529584"/>
-            <a:ext cx="11002975" cy="685800"/>
-          </a:xfrm>
-          <a:prstGeom prst="rect">
-            <a:avLst/>
-          </a:prstGeom>
-          <a:noFill/>
-        </p:spPr>
-        <p:txBody>
-          <a:bodyPr wrap="square">
-            <a:spAutoFit/>
-          </a:bodyPr>
-          <a:lstStyle/>
-          <a:p>
-            <a:pPr algn="ctr"/>
-            <a:r>
-              <a:rPr sz="4400" b="1" i="0">
-                <a:solidFill>
-                  <a:srgbClr val="FFFFFF"/>
-                </a:solidFill>
-                <a:latin typeface="Arial"/>
-              </a:rPr>
-              <a:t>背いて歩いた  滅びの - 道</a:t>
-            </a:r>
-          </a:p>
-        </p:txBody>
-      </p:sp>
-      <p:sp>
-        <p:nvSpPr>
-          <p:cNvPr id="6" name="TextBox 5"/>
-          <p:cNvSpPr txBox="1"/>
-          <p:nvPr/>
-        </p:nvSpPr>
-        <p:spPr>
-          <a:xfrm>
-            <a:off x="594360" y="4251960"/>
-            <a:ext cx="11002975" cy="384048"/>
-          </a:xfrm>
-          <a:prstGeom prst="rect">
-            <a:avLst/>
-          </a:prstGeom>
-          <a:noFill/>
-        </p:spPr>
-        <p:txBody>
-          <a:bodyPr wrap="square">
-            <a:spAutoFit/>
-          </a:bodyPr>
-          <a:lstStyle/>
-          <a:p>
-            <a:pPr algn="ctr"/>
-            <a:r>
-              <a:rPr sz="2400" b="0" i="1">
-                <a:solidFill>
-                  <a:srgbClr val="B4B4B4"/>
-                </a:solidFill>
-                <a:latin typeface="Arial"/>
-              </a:rPr>
-              <a:t>somuite aruita  horobi no michi</a:t>
+                  <a:srgbClr val="828282"/>
+                </a:solidFill>
+                <a:latin typeface="Arial"/>
+              </a:rPr>
+              <a:t>Tudo que Eu Tenho é Cristo</a:t>
             </a:r>
           </a:p>
         </p:txBody>
@@ -3298,8 +3298,8 @@
         </p:nvSpPr>
         <p:spPr>
           <a:xfrm>
-            <a:off x="594360" y="4672584"/>
-            <a:ext cx="11002975" cy="347472"/>
+            <a:off x="640080" y="4896612"/>
+            <a:ext cx="10911535" cy="310896"/>
           </a:xfrm>
           <a:prstGeom prst="rect">
             <a:avLst/>
@@ -3316,11 +3316,11 @@
             <a:r>
               <a:rPr sz="2000" b="0" i="1">
                 <a:solidFill>
-                  <a:srgbClr val="8C8C8C"/>
-                </a:solidFill>
-                <a:latin typeface="Arial"/>
-              </a:rPr>
-              <a:t/>
+                  <a:srgbClr val="828282"/>
+                </a:solidFill>
+                <a:latin typeface="Arial"/>
+              </a:rPr>
+              <a:t>Eu estava perdido na mais escura noite</a:t>
             </a:r>
           </a:p>
         </p:txBody>
@@ -3359,23 +3359,23 @@
         </p:nvSpPr>
         <p:spPr>
           <a:xfrm>
-            <a:off x="594360" y="2258568"/>
-            <a:ext cx="11002975" cy="685800"/>
-          </a:xfrm>
-          <a:prstGeom prst="rect">
-            <a:avLst/>
-          </a:prstGeom>
-          <a:noFill/>
-        </p:spPr>
-        <p:txBody>
-          <a:bodyPr wrap="square">
-            <a:spAutoFit/>
-          </a:bodyPr>
-          <a:lstStyle/>
-          <a:p>
-            <a:pPr algn="ctr"/>
-            <a:r>
-              <a:rPr sz="4400" b="1" i="0">
+            <a:off x="640080" y="2052828"/>
+            <a:ext cx="10911535" cy="731520"/>
+          </a:xfrm>
+          <a:prstGeom prst="rect">
+            <a:avLst/>
+          </a:prstGeom>
+          <a:noFill/>
+        </p:spPr>
+        <p:txBody>
+          <a:bodyPr wrap="square">
+            <a:spAutoFit/>
+          </a:bodyPr>
+          <a:lstStyle/>
+          <a:p>
+            <a:pPr algn="ctr"/>
+            <a:r>
+              <a:rPr sz="4800" b="1" i="0">
                 <a:solidFill>
                   <a:srgbClr val="FFFFFF"/>
                 </a:solidFill>
@@ -3394,99 +3394,29 @@
         </p:nvSpPr>
         <p:spPr>
           <a:xfrm>
-            <a:off x="594360" y="2980944"/>
-            <a:ext cx="11002975" cy="347472"/>
-          </a:xfrm>
-          <a:prstGeom prst="rect">
-            <a:avLst/>
-          </a:prstGeom>
-          <a:noFill/>
-        </p:spPr>
-        <p:txBody>
-          <a:bodyPr wrap="square">
-            <a:spAutoFit/>
-          </a:bodyPr>
-          <a:lstStyle/>
-          <a:p>
-            <a:pPr algn="ctr"/>
-            <a:r>
-              <a:rPr sz="2200" b="0" i="1">
-                <a:solidFill>
-                  <a:srgbClr val="8C8C8C"/>
-                </a:solidFill>
-                <a:latin typeface="Arial"/>
-              </a:rPr>
-              <a:t/>
-            </a:r>
-          </a:p>
-        </p:txBody>
-      </p:sp>
-      <p:sp>
-        <p:nvSpPr>
-          <p:cNvPr id="4" name="TextBox 3"/>
-          <p:cNvSpPr txBox="1"/>
-          <p:nvPr/>
-        </p:nvSpPr>
-        <p:spPr>
-          <a:xfrm>
-            <a:off x="594360" y="3529584"/>
-            <a:ext cx="11002975" cy="685800"/>
-          </a:xfrm>
-          <a:prstGeom prst="rect">
-            <a:avLst/>
-          </a:prstGeom>
-          <a:noFill/>
-        </p:spPr>
-        <p:txBody>
-          <a:bodyPr wrap="square">
-            <a:spAutoFit/>
-          </a:bodyPr>
-          <a:lstStyle/>
-          <a:p>
-            <a:pPr algn="ctr"/>
-            <a:r>
-              <a:rPr sz="3911" b="1" i="0">
+            <a:off x="640080" y="2985516"/>
+            <a:ext cx="10911535" cy="731520"/>
+          </a:xfrm>
+          <a:prstGeom prst="rect">
+            <a:avLst/>
+          </a:prstGeom>
+          <a:noFill/>
+        </p:spPr>
+        <p:txBody>
+          <a:bodyPr wrap="square">
+            <a:spAutoFit/>
+          </a:bodyPr>
+          <a:lstStyle/>
+          <a:p>
+            <a:pPr algn="ctr"/>
+            <a:r>
+              <a:rPr sz="4200" b="1" i="0">
                 <a:solidFill>
                   <a:srgbClr val="FFFFFF"/>
                 </a:solidFill>
                 <a:latin typeface="Arial"/>
               </a:rPr>
               <a:t>Se Tu não me tivesses amado primeiro</a:t>
-            </a:r>
-          </a:p>
-        </p:txBody>
-      </p:sp>
-      <p:sp>
-        <p:nvSpPr>
-          <p:cNvPr id="5" name="TextBox 4"/>
-          <p:cNvSpPr txBox="1"/>
-          <p:nvPr/>
-        </p:nvSpPr>
-        <p:spPr>
-          <a:xfrm>
-            <a:off x="594360" y="4251960"/>
-            <a:ext cx="11002975" cy="347472"/>
-          </a:xfrm>
-          <a:prstGeom prst="rect">
-            <a:avLst/>
-          </a:prstGeom>
-          <a:noFill/>
-        </p:spPr>
-        <p:txBody>
-          <a:bodyPr wrap="square">
-            <a:spAutoFit/>
-          </a:bodyPr>
-          <a:lstStyle/>
-          <a:p>
-            <a:pPr algn="ctr"/>
-            <a:r>
-              <a:rPr sz="2200" b="0" i="1">
-                <a:solidFill>
-                  <a:srgbClr val="8C8C8C"/>
-                </a:solidFill>
-                <a:latin typeface="Arial"/>
-              </a:rPr>
-              <a:t/>
             </a:r>
           </a:p>
         </p:txBody>
@@ -3525,23 +3455,23 @@
         </p:nvSpPr>
         <p:spPr>
           <a:xfrm>
-            <a:off x="594360" y="2258568"/>
-            <a:ext cx="11002975" cy="685800"/>
-          </a:xfrm>
-          <a:prstGeom prst="rect">
-            <a:avLst/>
-          </a:prstGeom>
-          <a:noFill/>
-        </p:spPr>
-        <p:txBody>
-          <a:bodyPr wrap="square">
-            <a:spAutoFit/>
-          </a:bodyPr>
-          <a:lstStyle/>
-          <a:p>
-            <a:pPr algn="ctr"/>
-            <a:r>
-              <a:rPr sz="4400" b="1" i="0">
+            <a:off x="640080" y="2052828"/>
+            <a:ext cx="10911535" cy="731520"/>
+          </a:xfrm>
+          <a:prstGeom prst="rect">
+            <a:avLst/>
+          </a:prstGeom>
+          <a:noFill/>
+        </p:spPr>
+        <p:txBody>
+          <a:bodyPr wrap="square">
+            <a:spAutoFit/>
+          </a:bodyPr>
+          <a:lstStyle/>
+          <a:p>
+            <a:pPr algn="ctr"/>
+            <a:r>
+              <a:rPr sz="4800" b="1" i="0">
                 <a:solidFill>
                   <a:srgbClr val="FFFFFF"/>
                 </a:solidFill>
@@ -3560,99 +3490,29 @@
         </p:nvSpPr>
         <p:spPr>
           <a:xfrm>
-            <a:off x="594360" y="2980944"/>
-            <a:ext cx="11002975" cy="347472"/>
-          </a:xfrm>
-          <a:prstGeom prst="rect">
-            <a:avLst/>
-          </a:prstGeom>
-          <a:noFill/>
-        </p:spPr>
-        <p:txBody>
-          <a:bodyPr wrap="square">
-            <a:spAutoFit/>
-          </a:bodyPr>
-          <a:lstStyle/>
-          <a:p>
-            <a:pPr algn="ctr"/>
-            <a:r>
-              <a:rPr sz="2200" b="0" i="1">
-                <a:solidFill>
-                  <a:srgbClr val="8C8C8C"/>
-                </a:solidFill>
-                <a:latin typeface="Arial"/>
-              </a:rPr>
-              <a:t/>
-            </a:r>
-          </a:p>
-        </p:txBody>
-      </p:sp>
-      <p:sp>
-        <p:nvSpPr>
-          <p:cNvPr id="4" name="TextBox 3"/>
-          <p:cNvSpPr txBox="1"/>
-          <p:nvPr/>
-        </p:nvSpPr>
-        <p:spPr>
-          <a:xfrm>
-            <a:off x="594360" y="3529584"/>
-            <a:ext cx="11002975" cy="685800"/>
-          </a:xfrm>
-          <a:prstGeom prst="rect">
-            <a:avLst/>
-          </a:prstGeom>
-          <a:noFill/>
-        </p:spPr>
-        <p:txBody>
-          <a:bodyPr wrap="square">
-            <a:spAutoFit/>
-          </a:bodyPr>
-          <a:lstStyle/>
-          <a:p>
-            <a:pPr algn="ctr"/>
-            <a:r>
-              <a:rPr sz="3705" b="1" i="0">
+            <a:off x="640080" y="2985516"/>
+            <a:ext cx="10911535" cy="731520"/>
+          </a:xfrm>
+          <a:prstGeom prst="rect">
+            <a:avLst/>
+          </a:prstGeom>
+          <a:noFill/>
+        </p:spPr>
+        <p:txBody>
+          <a:bodyPr wrap="square">
+            <a:spAutoFit/>
+          </a:bodyPr>
+          <a:lstStyle/>
+          <a:p>
+            <a:pPr algn="ctr"/>
+            <a:r>
+              <a:rPr sz="4000" b="1" i="0">
                 <a:solidFill>
                   <a:srgbClr val="FFFFFF"/>
                 </a:solidFill>
                 <a:latin typeface="Arial"/>
               </a:rPr>
               <a:t>Mas enquanto eu corria rumo à perdição</a:t>
-            </a:r>
-          </a:p>
-        </p:txBody>
-      </p:sp>
-      <p:sp>
-        <p:nvSpPr>
-          <p:cNvPr id="5" name="TextBox 4"/>
-          <p:cNvSpPr txBox="1"/>
-          <p:nvPr/>
-        </p:nvSpPr>
-        <p:spPr>
-          <a:xfrm>
-            <a:off x="594360" y="4251960"/>
-            <a:ext cx="11002975" cy="347472"/>
-          </a:xfrm>
-          <a:prstGeom prst="rect">
-            <a:avLst/>
-          </a:prstGeom>
-          <a:noFill/>
-        </p:spPr>
-        <p:txBody>
-          <a:bodyPr wrap="square">
-            <a:spAutoFit/>
-          </a:bodyPr>
-          <a:lstStyle/>
-          <a:p>
-            <a:pPr algn="ctr"/>
-            <a:r>
-              <a:rPr sz="2200" b="0" i="1">
-                <a:solidFill>
-                  <a:srgbClr val="8C8C8C"/>
-                </a:solidFill>
-                <a:latin typeface="Arial"/>
-              </a:rPr>
-              <a:t/>
             </a:r>
           </a:p>
         </p:txBody>
@@ -3691,23 +3551,23 @@
         </p:nvSpPr>
         <p:spPr>
           <a:xfrm>
-            <a:off x="594360" y="2258568"/>
-            <a:ext cx="11002975" cy="685800"/>
-          </a:xfrm>
-          <a:prstGeom prst="rect">
-            <a:avLst/>
-          </a:prstGeom>
-          <a:noFill/>
-        </p:spPr>
-        <p:txBody>
-          <a:bodyPr wrap="square">
-            <a:spAutoFit/>
-          </a:bodyPr>
-          <a:lstStyle/>
-          <a:p>
-            <a:pPr algn="ctr"/>
-            <a:r>
-              <a:rPr sz="4400" b="1" i="0">
+            <a:off x="640080" y="2052828"/>
+            <a:ext cx="10911535" cy="731520"/>
+          </a:xfrm>
+          <a:prstGeom prst="rect">
+            <a:avLst/>
+          </a:prstGeom>
+          <a:noFill/>
+        </p:spPr>
+        <p:txBody>
+          <a:bodyPr wrap="square">
+            <a:spAutoFit/>
+          </a:bodyPr>
+          <a:lstStyle/>
+          <a:p>
+            <a:pPr algn="ctr"/>
+            <a:r>
+              <a:rPr sz="4800" b="1" i="0">
                 <a:solidFill>
                   <a:srgbClr val="FFFFFF"/>
                 </a:solidFill>
@@ -3726,99 +3586,29 @@
         </p:nvSpPr>
         <p:spPr>
           <a:xfrm>
-            <a:off x="594360" y="2980944"/>
-            <a:ext cx="11002975" cy="347472"/>
-          </a:xfrm>
-          <a:prstGeom prst="rect">
-            <a:avLst/>
-          </a:prstGeom>
-          <a:noFill/>
-        </p:spPr>
-        <p:txBody>
-          <a:bodyPr wrap="square">
-            <a:spAutoFit/>
-          </a:bodyPr>
-          <a:lstStyle/>
-          <a:p>
-            <a:pPr algn="ctr"/>
-            <a:r>
-              <a:rPr sz="2200" b="0" i="1">
-                <a:solidFill>
-                  <a:srgbClr val="8C8C8C"/>
-                </a:solidFill>
-                <a:latin typeface="Arial"/>
-              </a:rPr>
-              <a:t/>
-            </a:r>
-          </a:p>
-        </p:txBody>
-      </p:sp>
-      <p:sp>
-        <p:nvSpPr>
-          <p:cNvPr id="4" name="TextBox 3"/>
-          <p:cNvSpPr txBox="1"/>
-          <p:nvPr/>
-        </p:nvSpPr>
-        <p:spPr>
-          <a:xfrm>
-            <a:off x="594360" y="3529584"/>
-            <a:ext cx="11002975" cy="685800"/>
-          </a:xfrm>
-          <a:prstGeom prst="rect">
-            <a:avLst/>
-          </a:prstGeom>
-          <a:noFill/>
-        </p:spPr>
-        <p:txBody>
-          <a:bodyPr wrap="square">
-            <a:spAutoFit/>
-          </a:bodyPr>
-          <a:lstStyle/>
-          <a:p>
-            <a:pPr algn="ctr"/>
-            <a:r>
-              <a:rPr sz="3805" b="1" i="0">
+            <a:off x="640080" y="2985516"/>
+            <a:ext cx="10911535" cy="731520"/>
+          </a:xfrm>
+          <a:prstGeom prst="rect">
+            <a:avLst/>
+          </a:prstGeom>
+          <a:noFill/>
+        </p:spPr>
+        <p:txBody>
+          <a:bodyPr wrap="square">
+            <a:spAutoFit/>
+          </a:bodyPr>
+          <a:lstStyle/>
+          <a:p>
+            <a:pPr algn="ctr"/>
+            <a:r>
+              <a:rPr sz="4100" b="1" i="0">
                 <a:solidFill>
                   <a:srgbClr val="FFFFFF"/>
                 </a:solidFill>
                 <a:latin typeface="Arial"/>
               </a:rPr>
               <a:t>Tu olhaste para o meu estado indefeso</a:t>
-            </a:r>
-          </a:p>
-        </p:txBody>
-      </p:sp>
-      <p:sp>
-        <p:nvSpPr>
-          <p:cNvPr id="5" name="TextBox 4"/>
-          <p:cNvSpPr txBox="1"/>
-          <p:nvPr/>
-        </p:nvSpPr>
-        <p:spPr>
-          <a:xfrm>
-            <a:off x="594360" y="4251960"/>
-            <a:ext cx="11002975" cy="347472"/>
-          </a:xfrm>
-          <a:prstGeom prst="rect">
-            <a:avLst/>
-          </a:prstGeom>
-          <a:noFill/>
-        </p:spPr>
-        <p:txBody>
-          <a:bodyPr wrap="square">
-            <a:spAutoFit/>
-          </a:bodyPr>
-          <a:lstStyle/>
-          <a:p>
-            <a:pPr algn="ctr"/>
-            <a:r>
-              <a:rPr sz="2200" b="0" i="1">
-                <a:solidFill>
-                  <a:srgbClr val="8C8C8C"/>
-                </a:solidFill>
-                <a:latin typeface="Arial"/>
-              </a:rPr>
-              <a:t/>
             </a:r>
           </a:p>
         </p:txBody>
@@ -3857,23 +3647,23 @@
         </p:nvSpPr>
         <p:spPr>
           <a:xfrm>
-            <a:off x="594360" y="2258568"/>
-            <a:ext cx="11002975" cy="685800"/>
-          </a:xfrm>
-          <a:prstGeom prst="rect">
-            <a:avLst/>
-          </a:prstGeom>
-          <a:noFill/>
-        </p:spPr>
-        <p:txBody>
-          <a:bodyPr wrap="square">
-            <a:spAutoFit/>
-          </a:bodyPr>
-          <a:lstStyle/>
-          <a:p>
-            <a:pPr algn="ctr"/>
-            <a:r>
-              <a:rPr sz="4400" b="1" i="0">
+            <a:off x="640080" y="2052828"/>
+            <a:ext cx="10911535" cy="731520"/>
+          </a:xfrm>
+          <a:prstGeom prst="rect">
+            <a:avLst/>
+          </a:prstGeom>
+          <a:noFill/>
+        </p:spPr>
+        <p:txBody>
+          <a:bodyPr wrap="square">
+            <a:spAutoFit/>
+          </a:bodyPr>
+          <a:lstStyle/>
+          <a:p>
+            <a:pPr algn="ctr"/>
+            <a:r>
+              <a:rPr sz="4800" b="1" i="0">
                 <a:solidFill>
                   <a:srgbClr val="FFFFFF"/>
                 </a:solidFill>
@@ -3892,99 +3682,29 @@
         </p:nvSpPr>
         <p:spPr>
           <a:xfrm>
-            <a:off x="594360" y="2980944"/>
-            <a:ext cx="11002975" cy="347472"/>
-          </a:xfrm>
-          <a:prstGeom prst="rect">
-            <a:avLst/>
-          </a:prstGeom>
-          <a:noFill/>
-        </p:spPr>
-        <p:txBody>
-          <a:bodyPr wrap="square">
-            <a:spAutoFit/>
-          </a:bodyPr>
-          <a:lstStyle/>
-          <a:p>
-            <a:pPr algn="ctr"/>
-            <a:r>
-              <a:rPr sz="2200" b="0" i="1">
-                <a:solidFill>
-                  <a:srgbClr val="8C8C8C"/>
-                </a:solidFill>
-                <a:latin typeface="Arial"/>
-              </a:rPr>
-              <a:t/>
-            </a:r>
-          </a:p>
-        </p:txBody>
-      </p:sp>
-      <p:sp>
-        <p:nvSpPr>
-          <p:cNvPr id="4" name="TextBox 3"/>
-          <p:cNvSpPr txBox="1"/>
-          <p:nvPr/>
-        </p:nvSpPr>
-        <p:spPr>
-          <a:xfrm>
-            <a:off x="594360" y="3529584"/>
-            <a:ext cx="11002975" cy="685800"/>
-          </a:xfrm>
-          <a:prstGeom prst="rect">
-            <a:avLst/>
-          </a:prstGeom>
-          <a:noFill/>
-        </p:spPr>
-        <p:txBody>
-          <a:bodyPr wrap="square">
-            <a:spAutoFit/>
-          </a:bodyPr>
-          <a:lstStyle/>
-          <a:p>
-            <a:pPr algn="ctr"/>
-            <a:r>
-              <a:rPr sz="4400" b="1" i="0">
+            <a:off x="640080" y="2985516"/>
+            <a:ext cx="10911535" cy="731520"/>
+          </a:xfrm>
+          <a:prstGeom prst="rect">
+            <a:avLst/>
+          </a:prstGeom>
+          <a:noFill/>
+        </p:spPr>
+        <p:txBody>
+          <a:bodyPr wrap="square">
+            <a:spAutoFit/>
+          </a:bodyPr>
+          <a:lstStyle/>
+          <a:p>
+            <a:pPr algn="ctr"/>
+            <a:r>
+              <a:rPr sz="4800" b="1" i="0">
                 <a:solidFill>
                   <a:srgbClr val="FFFFFF"/>
                 </a:solidFill>
                 <a:latin typeface="Arial"/>
               </a:rPr>
               <a:t>E vi o amor de Deus revelado</a:t>
-            </a:r>
-          </a:p>
-        </p:txBody>
-      </p:sp>
-      <p:sp>
-        <p:nvSpPr>
-          <p:cNvPr id="5" name="TextBox 4"/>
-          <p:cNvSpPr txBox="1"/>
-          <p:nvPr/>
-        </p:nvSpPr>
-        <p:spPr>
-          <a:xfrm>
-            <a:off x="594360" y="4251960"/>
-            <a:ext cx="11002975" cy="347472"/>
-          </a:xfrm>
-          <a:prstGeom prst="rect">
-            <a:avLst/>
-          </a:prstGeom>
-          <a:noFill/>
-        </p:spPr>
-        <p:txBody>
-          <a:bodyPr wrap="square">
-            <a:spAutoFit/>
-          </a:bodyPr>
-          <a:lstStyle/>
-          <a:p>
-            <a:pPr algn="ctr"/>
-            <a:r>
-              <a:rPr sz="2200" b="0" i="1">
-                <a:solidFill>
-                  <a:srgbClr val="8C8C8C"/>
-                </a:solidFill>
-                <a:latin typeface="Arial"/>
-              </a:rPr>
-              <a:t/>
             </a:r>
           </a:p>
         </p:txBody>
@@ -4023,23 +3743,23 @@
         </p:nvSpPr>
         <p:spPr>
           <a:xfrm>
-            <a:off x="594360" y="2258568"/>
-            <a:ext cx="11002975" cy="685800"/>
-          </a:xfrm>
-          <a:prstGeom prst="rect">
-            <a:avLst/>
-          </a:prstGeom>
-          <a:noFill/>
-        </p:spPr>
-        <p:txBody>
-          <a:bodyPr wrap="square">
-            <a:spAutoFit/>
-          </a:bodyPr>
-          <a:lstStyle/>
-          <a:p>
-            <a:pPr algn="ctr"/>
-            <a:r>
-              <a:rPr sz="4400" b="1" i="0">
+            <a:off x="640080" y="2052828"/>
+            <a:ext cx="10911535" cy="731520"/>
+          </a:xfrm>
+          <a:prstGeom prst="rect">
+            <a:avLst/>
+          </a:prstGeom>
+          <a:noFill/>
+        </p:spPr>
+        <p:txBody>
+          <a:bodyPr wrap="square">
+            <a:spAutoFit/>
+          </a:bodyPr>
+          <a:lstStyle/>
+          <a:p>
+            <a:pPr algn="ctr"/>
+            <a:r>
+              <a:rPr sz="4800" b="1" i="0">
                 <a:solidFill>
                   <a:srgbClr val="FFFFFF"/>
                 </a:solidFill>
@@ -4058,99 +3778,29 @@
         </p:nvSpPr>
         <p:spPr>
           <a:xfrm>
-            <a:off x="594360" y="2980944"/>
-            <a:ext cx="11002975" cy="347472"/>
-          </a:xfrm>
-          <a:prstGeom prst="rect">
-            <a:avLst/>
-          </a:prstGeom>
-          <a:noFill/>
-        </p:spPr>
-        <p:txBody>
-          <a:bodyPr wrap="square">
-            <a:spAutoFit/>
-          </a:bodyPr>
-          <a:lstStyle/>
-          <a:p>
-            <a:pPr algn="ctr"/>
-            <a:r>
-              <a:rPr sz="2200" b="0" i="1">
-                <a:solidFill>
-                  <a:srgbClr val="8C8C8C"/>
-                </a:solidFill>
-                <a:latin typeface="Arial"/>
-              </a:rPr>
-              <a:t/>
-            </a:r>
-          </a:p>
-        </p:txBody>
-      </p:sp>
-      <p:sp>
-        <p:nvSpPr>
-          <p:cNvPr id="4" name="TextBox 3"/>
-          <p:cNvSpPr txBox="1"/>
-          <p:nvPr/>
-        </p:nvSpPr>
-        <p:spPr>
-          <a:xfrm>
-            <a:off x="594360" y="3529584"/>
-            <a:ext cx="11002975" cy="685800"/>
-          </a:xfrm>
-          <a:prstGeom prst="rect">
-            <a:avLst/>
-          </a:prstGeom>
-          <a:noFill/>
-        </p:spPr>
-        <p:txBody>
-          <a:bodyPr wrap="square">
-            <a:spAutoFit/>
-          </a:bodyPr>
-          <a:lstStyle/>
-          <a:p>
-            <a:pPr algn="ctr"/>
-            <a:r>
-              <a:rPr sz="4022" b="1" i="0">
+            <a:off x="640080" y="2985516"/>
+            <a:ext cx="10911535" cy="731520"/>
+          </a:xfrm>
+          <a:prstGeom prst="rect">
+            <a:avLst/>
+          </a:prstGeom>
+          <a:noFill/>
+        </p:spPr>
+        <p:txBody>
+          <a:bodyPr wrap="square">
+            <a:spAutoFit/>
+          </a:bodyPr>
+          <a:lstStyle/>
+          <a:p>
+            <a:pPr algn="ctr"/>
+            <a:r>
+              <a:rPr sz="4300" b="1" i="0">
                 <a:solidFill>
                   <a:srgbClr val="FFFFFF"/>
                 </a:solidFill>
                 <a:latin typeface="Arial"/>
               </a:rPr>
               <a:t>Suportaste a ira reservada para mim</a:t>
-            </a:r>
-          </a:p>
-        </p:txBody>
-      </p:sp>
-      <p:sp>
-        <p:nvSpPr>
-          <p:cNvPr id="5" name="TextBox 4"/>
-          <p:cNvSpPr txBox="1"/>
-          <p:nvPr/>
-        </p:nvSpPr>
-        <p:spPr>
-          <a:xfrm>
-            <a:off x="594360" y="4251960"/>
-            <a:ext cx="11002975" cy="347472"/>
-          </a:xfrm>
-          <a:prstGeom prst="rect">
-            <a:avLst/>
-          </a:prstGeom>
-          <a:noFill/>
-        </p:spPr>
-        <p:txBody>
-          <a:bodyPr wrap="square">
-            <a:spAutoFit/>
-          </a:bodyPr>
-          <a:lstStyle/>
-          <a:p>
-            <a:pPr algn="ctr"/>
-            <a:r>
-              <a:rPr sz="2200" b="0" i="1">
-                <a:solidFill>
-                  <a:srgbClr val="8C8C8C"/>
-                </a:solidFill>
-                <a:latin typeface="Arial"/>
-              </a:rPr>
-              <a:t/>
             </a:r>
           </a:p>
         </p:txBody>
@@ -4189,23 +3839,23 @@
         </p:nvSpPr>
         <p:spPr>
           <a:xfrm>
-            <a:off x="594360" y="2258568"/>
-            <a:ext cx="11002975" cy="685800"/>
-          </a:xfrm>
-          <a:prstGeom prst="rect">
-            <a:avLst/>
-          </a:prstGeom>
-          <a:noFill/>
-        </p:spPr>
-        <p:txBody>
-          <a:bodyPr wrap="square">
-            <a:spAutoFit/>
-          </a:bodyPr>
-          <a:lstStyle/>
-          <a:p>
-            <a:pPr algn="ctr"/>
-            <a:r>
-              <a:rPr sz="4400" b="1" i="0">
+            <a:off x="640080" y="2052828"/>
+            <a:ext cx="10911535" cy="731520"/>
+          </a:xfrm>
+          <a:prstGeom prst="rect">
+            <a:avLst/>
+          </a:prstGeom>
+          <a:noFill/>
+        </p:spPr>
+        <p:txBody>
+          <a:bodyPr wrap="square">
+            <a:spAutoFit/>
+          </a:bodyPr>
+          <a:lstStyle/>
+          <a:p>
+            <a:pPr algn="ctr"/>
+            <a:r>
+              <a:rPr sz="4800" b="1" i="0">
                 <a:solidFill>
                   <a:srgbClr val="FFFFFF"/>
                 </a:solidFill>
@@ -4224,99 +3874,29 @@
         </p:nvSpPr>
         <p:spPr>
           <a:xfrm>
-            <a:off x="594360" y="2980944"/>
-            <a:ext cx="11002975" cy="347472"/>
-          </a:xfrm>
-          <a:prstGeom prst="rect">
-            <a:avLst/>
-          </a:prstGeom>
-          <a:noFill/>
-        </p:spPr>
-        <p:txBody>
-          <a:bodyPr wrap="square">
-            <a:spAutoFit/>
-          </a:bodyPr>
-          <a:lstStyle/>
-          <a:p>
-            <a:pPr algn="ctr"/>
-            <a:r>
-              <a:rPr sz="2200" b="0" i="1">
-                <a:solidFill>
-                  <a:srgbClr val="8C8C8C"/>
-                </a:solidFill>
-                <a:latin typeface="Arial"/>
-              </a:rPr>
-              <a:t/>
-            </a:r>
-          </a:p>
-        </p:txBody>
-      </p:sp>
-      <p:sp>
-        <p:nvSpPr>
-          <p:cNvPr id="4" name="TextBox 3"/>
-          <p:cNvSpPr txBox="1"/>
-          <p:nvPr/>
-        </p:nvSpPr>
-        <p:spPr>
-          <a:xfrm>
-            <a:off x="594360" y="3529584"/>
-            <a:ext cx="11002975" cy="685800"/>
-          </a:xfrm>
-          <a:prstGeom prst="rect">
-            <a:avLst/>
-          </a:prstGeom>
-          <a:noFill/>
-        </p:spPr>
-        <p:txBody>
-          <a:bodyPr wrap="square">
-            <a:spAutoFit/>
-          </a:bodyPr>
-          <a:lstStyle/>
-          <a:p>
-            <a:pPr algn="ctr"/>
-            <a:r>
-              <a:rPr sz="4022" b="1" i="0">
+            <a:off x="640080" y="2985516"/>
+            <a:ext cx="10911535" cy="731520"/>
+          </a:xfrm>
+          <a:prstGeom prst="rect">
+            <a:avLst/>
+          </a:prstGeom>
+          <a:noFill/>
+        </p:spPr>
+        <p:txBody>
+          <a:bodyPr wrap="square">
+            <a:spAutoFit/>
+          </a:bodyPr>
+          <a:lstStyle/>
+          <a:p>
+            <a:pPr algn="ctr"/>
+            <a:r>
+              <a:rPr sz="4300" b="1" i="0">
                 <a:solidFill>
                   <a:srgbClr val="FFFFFF"/>
                 </a:solidFill>
                 <a:latin typeface="Arial"/>
               </a:rPr>
               <a:t>Aleluia! Tudo que eu tenho é Cristo</a:t>
-            </a:r>
-          </a:p>
-        </p:txBody>
-      </p:sp>
-      <p:sp>
-        <p:nvSpPr>
-          <p:cNvPr id="5" name="TextBox 4"/>
-          <p:cNvSpPr txBox="1"/>
-          <p:nvPr/>
-        </p:nvSpPr>
-        <p:spPr>
-          <a:xfrm>
-            <a:off x="594360" y="4251960"/>
-            <a:ext cx="11002975" cy="347472"/>
-          </a:xfrm>
-          <a:prstGeom prst="rect">
-            <a:avLst/>
-          </a:prstGeom>
-          <a:noFill/>
-        </p:spPr>
-        <p:txBody>
-          <a:bodyPr wrap="square">
-            <a:spAutoFit/>
-          </a:bodyPr>
-          <a:lstStyle/>
-          <a:p>
-            <a:pPr algn="ctr"/>
-            <a:r>
-              <a:rPr sz="2200" b="0" i="1">
-                <a:solidFill>
-                  <a:srgbClr val="8C8C8C"/>
-                </a:solidFill>
-                <a:latin typeface="Arial"/>
-              </a:rPr>
-              <a:t/>
             </a:r>
           </a:p>
         </p:txBody>
@@ -4355,23 +3935,23 @@
         </p:nvSpPr>
         <p:spPr>
           <a:xfrm>
-            <a:off x="594360" y="2258568"/>
-            <a:ext cx="11002975" cy="685800"/>
-          </a:xfrm>
-          <a:prstGeom prst="rect">
-            <a:avLst/>
-          </a:prstGeom>
-          <a:noFill/>
-        </p:spPr>
-        <p:txBody>
-          <a:bodyPr wrap="square">
-            <a:spAutoFit/>
-          </a:bodyPr>
-          <a:lstStyle/>
-          <a:p>
-            <a:pPr algn="ctr"/>
-            <a:r>
-              <a:rPr sz="4400" b="1" i="0">
+            <a:off x="640080" y="2052828"/>
+            <a:ext cx="10911535" cy="731520"/>
+          </a:xfrm>
+          <a:prstGeom prst="rect">
+            <a:avLst/>
+          </a:prstGeom>
+          <a:noFill/>
+        </p:spPr>
+        <p:txBody>
+          <a:bodyPr wrap="square">
+            <a:spAutoFit/>
+          </a:bodyPr>
+          <a:lstStyle/>
+          <a:p>
+            <a:pPr algn="ctr"/>
+            <a:r>
+              <a:rPr sz="4800" b="1" i="0">
                 <a:solidFill>
                   <a:srgbClr val="FFFFFF"/>
                 </a:solidFill>
@@ -4390,99 +3970,29 @@
         </p:nvSpPr>
         <p:spPr>
           <a:xfrm>
-            <a:off x="594360" y="2980944"/>
-            <a:ext cx="11002975" cy="347472"/>
-          </a:xfrm>
-          <a:prstGeom prst="rect">
-            <a:avLst/>
-          </a:prstGeom>
-          <a:noFill/>
-        </p:spPr>
-        <p:txBody>
-          <a:bodyPr wrap="square">
-            <a:spAutoFit/>
-          </a:bodyPr>
-          <a:lstStyle/>
-          <a:p>
-            <a:pPr algn="ctr"/>
-            <a:r>
-              <a:rPr sz="2200" b="0" i="1">
-                <a:solidFill>
-                  <a:srgbClr val="8C8C8C"/>
-                </a:solidFill>
-                <a:latin typeface="Arial"/>
-              </a:rPr>
-              <a:t/>
-            </a:r>
-          </a:p>
-        </p:txBody>
-      </p:sp>
-      <p:sp>
-        <p:nvSpPr>
-          <p:cNvPr id="4" name="TextBox 3"/>
-          <p:cNvSpPr txBox="1"/>
-          <p:nvPr/>
-        </p:nvSpPr>
-        <p:spPr>
-          <a:xfrm>
-            <a:off x="594360" y="3529584"/>
-            <a:ext cx="11002975" cy="685800"/>
-          </a:xfrm>
-          <a:prstGeom prst="rect">
-            <a:avLst/>
-          </a:prstGeom>
-          <a:noFill/>
-        </p:spPr>
-        <p:txBody>
-          <a:bodyPr wrap="square">
-            <a:spAutoFit/>
-          </a:bodyPr>
-          <a:lstStyle/>
-          <a:p>
-            <a:pPr algn="ctr"/>
-            <a:r>
-              <a:rPr sz="4022" b="1" i="0">
+            <a:off x="640080" y="2985516"/>
+            <a:ext cx="10911535" cy="731520"/>
+          </a:xfrm>
+          <a:prstGeom prst="rect">
+            <a:avLst/>
+          </a:prstGeom>
+          <a:noFill/>
+        </p:spPr>
+        <p:txBody>
+          <a:bodyPr wrap="square">
+            <a:spAutoFit/>
+          </a:bodyPr>
+          <a:lstStyle/>
+          <a:p>
+            <a:pPr algn="ctr"/>
+            <a:r>
+              <a:rPr sz="4300" b="1" i="0">
                 <a:solidFill>
                   <a:srgbClr val="FFFFFF"/>
                 </a:solidFill>
                 <a:latin typeface="Arial"/>
               </a:rPr>
               <a:t>Aleluia! Tudo que eu tenho é Cristo</a:t>
-            </a:r>
-          </a:p>
-        </p:txBody>
-      </p:sp>
-      <p:sp>
-        <p:nvSpPr>
-          <p:cNvPr id="5" name="TextBox 4"/>
-          <p:cNvSpPr txBox="1"/>
-          <p:nvPr/>
-        </p:nvSpPr>
-        <p:spPr>
-          <a:xfrm>
-            <a:off x="594360" y="4251960"/>
-            <a:ext cx="11002975" cy="347472"/>
-          </a:xfrm>
-          <a:prstGeom prst="rect">
-            <a:avLst/>
-          </a:prstGeom>
-          <a:noFill/>
-        </p:spPr>
-        <p:txBody>
-          <a:bodyPr wrap="square">
-            <a:spAutoFit/>
-          </a:bodyPr>
-          <a:lstStyle/>
-          <a:p>
-            <a:pPr algn="ctr"/>
-            <a:r>
-              <a:rPr sz="2200" b="0" i="1">
-                <a:solidFill>
-                  <a:srgbClr val="8C8C8C"/>
-                </a:solidFill>
-                <a:latin typeface="Arial"/>
-              </a:rPr>
-              <a:t/>
             </a:r>
           </a:p>
         </p:txBody>
@@ -4521,23 +4031,23 @@
         </p:nvSpPr>
         <p:spPr>
           <a:xfrm>
-            <a:off x="594360" y="2258568"/>
-            <a:ext cx="11002975" cy="685800"/>
-          </a:xfrm>
-          <a:prstGeom prst="rect">
-            <a:avLst/>
-          </a:prstGeom>
-          <a:noFill/>
-        </p:spPr>
-        <p:txBody>
-          <a:bodyPr wrap="square">
-            <a:spAutoFit/>
-          </a:bodyPr>
-          <a:lstStyle/>
-          <a:p>
-            <a:pPr algn="ctr"/>
-            <a:r>
-              <a:rPr sz="3911" b="1" i="0">
+            <a:off x="640080" y="2052828"/>
+            <a:ext cx="10911535" cy="731520"/>
+          </a:xfrm>
+          <a:prstGeom prst="rect">
+            <a:avLst/>
+          </a:prstGeom>
+          <a:noFill/>
+        </p:spPr>
+        <p:txBody>
+          <a:bodyPr wrap="square">
+            <a:spAutoFit/>
+          </a:bodyPr>
+          <a:lstStyle/>
+          <a:p>
+            <a:pPr algn="ctr"/>
+            <a:r>
+              <a:rPr sz="4200" b="1" i="0">
                 <a:solidFill>
                   <a:srgbClr val="FFFFFF"/>
                 </a:solidFill>
@@ -4556,99 +4066,29 @@
         </p:nvSpPr>
         <p:spPr>
           <a:xfrm>
-            <a:off x="594360" y="2980944"/>
-            <a:ext cx="11002975" cy="347472"/>
-          </a:xfrm>
-          <a:prstGeom prst="rect">
-            <a:avLst/>
-          </a:prstGeom>
-          <a:noFill/>
-        </p:spPr>
-        <p:txBody>
-          <a:bodyPr wrap="square">
-            <a:spAutoFit/>
-          </a:bodyPr>
-          <a:lstStyle/>
-          <a:p>
-            <a:pPr algn="ctr"/>
-            <a:r>
-              <a:rPr sz="2200" b="0" i="1">
-                <a:solidFill>
-                  <a:srgbClr val="8C8C8C"/>
-                </a:solidFill>
-                <a:latin typeface="Arial"/>
-              </a:rPr>
-              <a:t/>
-            </a:r>
-          </a:p>
-        </p:txBody>
-      </p:sp>
-      <p:sp>
-        <p:nvSpPr>
-          <p:cNvPr id="4" name="TextBox 3"/>
-          <p:cNvSpPr txBox="1"/>
-          <p:nvPr/>
-        </p:nvSpPr>
-        <p:spPr>
-          <a:xfrm>
-            <a:off x="594360" y="3529584"/>
-            <a:ext cx="11002975" cy="685800"/>
-          </a:xfrm>
-          <a:prstGeom prst="rect">
-            <a:avLst/>
-          </a:prstGeom>
-          <a:noFill/>
-        </p:spPr>
-        <p:txBody>
-          <a:bodyPr wrap="square">
-            <a:spAutoFit/>
-          </a:bodyPr>
-          <a:lstStyle/>
-          <a:p>
-            <a:pPr algn="ctr"/>
-            <a:r>
-              <a:rPr sz="4400" b="1" i="0">
+            <a:off x="640080" y="2985516"/>
+            <a:ext cx="10911535" cy="731520"/>
+          </a:xfrm>
+          <a:prstGeom prst="rect">
+            <a:avLst/>
+          </a:prstGeom>
+          <a:noFill/>
+        </p:spPr>
+        <p:txBody>
+          <a:bodyPr wrap="square">
+            <a:spAutoFit/>
+          </a:bodyPr>
+          <a:lstStyle/>
+          <a:p>
+            <a:pPr algn="ctr"/>
+            <a:r>
+              <a:rPr sz="4800" b="1" i="0">
                 <a:solidFill>
                   <a:srgbClr val="FFFFFF"/>
                 </a:solidFill>
                 <a:latin typeface="Arial"/>
               </a:rPr>
               <a:t>Cada coisa que antes me prendia</a:t>
-            </a:r>
-          </a:p>
-        </p:txBody>
-      </p:sp>
-      <p:sp>
-        <p:nvSpPr>
-          <p:cNvPr id="5" name="TextBox 4"/>
-          <p:cNvSpPr txBox="1"/>
-          <p:nvPr/>
-        </p:nvSpPr>
-        <p:spPr>
-          <a:xfrm>
-            <a:off x="594360" y="4251960"/>
-            <a:ext cx="11002975" cy="347472"/>
-          </a:xfrm>
-          <a:prstGeom prst="rect">
-            <a:avLst/>
-          </a:prstGeom>
-          <a:noFill/>
-        </p:spPr>
-        <p:txBody>
-          <a:bodyPr wrap="square">
-            <a:spAutoFit/>
-          </a:bodyPr>
-          <a:lstStyle/>
-          <a:p>
-            <a:pPr algn="ctr"/>
-            <a:r>
-              <a:rPr sz="2200" b="0" i="1">
-                <a:solidFill>
-                  <a:srgbClr val="8C8C8C"/>
-                </a:solidFill>
-                <a:latin typeface="Arial"/>
-              </a:rPr>
-              <a:t/>
             </a:r>
           </a:p>
         </p:txBody>
@@ -4687,23 +4127,23 @@
         </p:nvSpPr>
         <p:spPr>
           <a:xfrm>
-            <a:off x="594360" y="2258568"/>
-            <a:ext cx="11002975" cy="685800"/>
-          </a:xfrm>
-          <a:prstGeom prst="rect">
-            <a:avLst/>
-          </a:prstGeom>
-          <a:noFill/>
-        </p:spPr>
-        <p:txBody>
-          <a:bodyPr wrap="square">
-            <a:spAutoFit/>
-          </a:bodyPr>
-          <a:lstStyle/>
-          <a:p>
-            <a:pPr algn="ctr"/>
-            <a:r>
-              <a:rPr sz="4400" b="1" i="0">
+            <a:off x="640080" y="2052828"/>
+            <a:ext cx="10911535" cy="731520"/>
+          </a:xfrm>
+          <a:prstGeom prst="rect">
+            <a:avLst/>
+          </a:prstGeom>
+          <a:noFill/>
+        </p:spPr>
+        <p:txBody>
+          <a:bodyPr wrap="square">
+            <a:spAutoFit/>
+          </a:bodyPr>
+          <a:lstStyle/>
+          <a:p>
+            <a:pPr algn="ctr"/>
+            <a:r>
+              <a:rPr sz="4800" b="1" i="0">
                 <a:solidFill>
                   <a:srgbClr val="FFFFFF"/>
                 </a:solidFill>
@@ -4722,99 +4162,29 @@
         </p:nvSpPr>
         <p:spPr>
           <a:xfrm>
-            <a:off x="594360" y="2980944"/>
-            <a:ext cx="11002975" cy="347472"/>
-          </a:xfrm>
-          <a:prstGeom prst="rect">
-            <a:avLst/>
-          </a:prstGeom>
-          <a:noFill/>
-        </p:spPr>
-        <p:txBody>
-          <a:bodyPr wrap="square">
-            <a:spAutoFit/>
-          </a:bodyPr>
-          <a:lstStyle/>
-          <a:p>
-            <a:pPr algn="ctr"/>
-            <a:r>
-              <a:rPr sz="2200" b="0" i="1">
-                <a:solidFill>
-                  <a:srgbClr val="8C8C8C"/>
-                </a:solidFill>
-                <a:latin typeface="Arial"/>
-              </a:rPr>
-              <a:t/>
-            </a:r>
-          </a:p>
-        </p:txBody>
-      </p:sp>
-      <p:sp>
-        <p:nvSpPr>
-          <p:cNvPr id="4" name="TextBox 3"/>
-          <p:cNvSpPr txBox="1"/>
-          <p:nvPr/>
-        </p:nvSpPr>
-        <p:spPr>
-          <a:xfrm>
-            <a:off x="594360" y="3529584"/>
-            <a:ext cx="11002975" cy="685800"/>
-          </a:xfrm>
-          <a:prstGeom prst="rect">
-            <a:avLst/>
-          </a:prstGeom>
-          <a:noFill/>
-        </p:spPr>
-        <p:txBody>
-          <a:bodyPr wrap="square">
-            <a:spAutoFit/>
-          </a:bodyPr>
-          <a:lstStyle/>
-          <a:p>
-            <a:pPr algn="ctr"/>
-            <a:r>
-              <a:rPr sz="4400" b="1" i="0">
+            <a:off x="640080" y="2985516"/>
+            <a:ext cx="10911535" cy="731520"/>
+          </a:xfrm>
+          <a:prstGeom prst="rect">
+            <a:avLst/>
+          </a:prstGeom>
+          <a:noFill/>
+        </p:spPr>
+        <p:txBody>
+          <a:bodyPr wrap="square">
+            <a:spAutoFit/>
+          </a:bodyPr>
+          <a:lstStyle/>
+          <a:p>
+            <a:pPr algn="ctr"/>
+            <a:r>
+              <a:rPr sz="4800" b="1" i="0">
                 <a:solidFill>
                   <a:srgbClr val="FFFFFF"/>
                 </a:solidFill>
                 <a:latin typeface="Arial"/>
               </a:rPr>
               <a:t>Senão estar em Ti para sempre</a:t>
-            </a:r>
-          </a:p>
-        </p:txBody>
-      </p:sp>
-      <p:sp>
-        <p:nvSpPr>
-          <p:cNvPr id="5" name="TextBox 4"/>
-          <p:cNvSpPr txBox="1"/>
-          <p:nvPr/>
-        </p:nvSpPr>
-        <p:spPr>
-          <a:xfrm>
-            <a:off x="594360" y="4251960"/>
-            <a:ext cx="11002975" cy="347472"/>
-          </a:xfrm>
-          <a:prstGeom prst="rect">
-            <a:avLst/>
-          </a:prstGeom>
-          <a:noFill/>
-        </p:spPr>
-        <p:txBody>
-          <a:bodyPr wrap="square">
-            <a:spAutoFit/>
-          </a:bodyPr>
-          <a:lstStyle/>
-          <a:p>
-            <a:pPr algn="ctr"/>
-            <a:r>
-              <a:rPr sz="2200" b="0" i="1">
-                <a:solidFill>
-                  <a:srgbClr val="8C8C8C"/>
-                </a:solidFill>
-                <a:latin typeface="Arial"/>
-              </a:rPr>
-              <a:t/>
             </a:r>
           </a:p>
         </p:txBody>
@@ -4853,23 +4223,23 @@
         </p:nvSpPr>
         <p:spPr>
           <a:xfrm>
-            <a:off x="594360" y="2258568"/>
-            <a:ext cx="11002975" cy="685800"/>
-          </a:xfrm>
-          <a:prstGeom prst="rect">
-            <a:avLst/>
-          </a:prstGeom>
-          <a:noFill/>
-        </p:spPr>
-        <p:txBody>
-          <a:bodyPr wrap="square">
-            <a:spAutoFit/>
-          </a:bodyPr>
-          <a:lstStyle/>
-          <a:p>
-            <a:pPr algn="ctr"/>
-            <a:r>
-              <a:rPr sz="3911" b="1" i="0">
+            <a:off x="640080" y="2052828"/>
+            <a:ext cx="10911535" cy="731520"/>
+          </a:xfrm>
+          <a:prstGeom prst="rect">
+            <a:avLst/>
+          </a:prstGeom>
+          <a:noFill/>
+        </p:spPr>
+        <p:txBody>
+          <a:bodyPr wrap="square">
+            <a:spAutoFit/>
+          </a:bodyPr>
+          <a:lstStyle/>
+          <a:p>
+            <a:pPr algn="ctr"/>
+            <a:r>
+              <a:rPr sz="4200" b="1" i="0">
                 <a:solidFill>
                   <a:srgbClr val="FFFFFF"/>
                 </a:solidFill>
@@ -4888,99 +4258,29 @@
         </p:nvSpPr>
         <p:spPr>
           <a:xfrm>
-            <a:off x="594360" y="2980944"/>
-            <a:ext cx="11002975" cy="347472"/>
-          </a:xfrm>
-          <a:prstGeom prst="rect">
-            <a:avLst/>
-          </a:prstGeom>
-          <a:noFill/>
-        </p:spPr>
-        <p:txBody>
-          <a:bodyPr wrap="square">
-            <a:spAutoFit/>
-          </a:bodyPr>
-          <a:lstStyle/>
-          <a:p>
-            <a:pPr algn="ctr"/>
-            <a:r>
-              <a:rPr sz="2200" b="0" i="1">
-                <a:solidFill>
-                  <a:srgbClr val="8C8C8C"/>
-                </a:solidFill>
-                <a:latin typeface="Arial"/>
-              </a:rPr>
-              <a:t/>
-            </a:r>
-          </a:p>
-        </p:txBody>
-      </p:sp>
-      <p:sp>
-        <p:nvSpPr>
-          <p:cNvPr id="4" name="TextBox 3"/>
-          <p:cNvSpPr txBox="1"/>
-          <p:nvPr/>
-        </p:nvSpPr>
-        <p:spPr>
-          <a:xfrm>
-            <a:off x="594360" y="3529584"/>
-            <a:ext cx="11002975" cy="685800"/>
-          </a:xfrm>
-          <a:prstGeom prst="rect">
-            <a:avLst/>
-          </a:prstGeom>
-          <a:noFill/>
-        </p:spPr>
-        <p:txBody>
-          <a:bodyPr wrap="square">
-            <a:spAutoFit/>
-          </a:bodyPr>
-          <a:lstStyle/>
-          <a:p>
-            <a:pPr algn="ctr"/>
-            <a:r>
-              <a:rPr sz="4400" b="1" i="0">
+            <a:off x="640080" y="2985516"/>
+            <a:ext cx="10911535" cy="731520"/>
+          </a:xfrm>
+          <a:prstGeom prst="rect">
+            <a:avLst/>
+          </a:prstGeom>
+          <a:noFill/>
+        </p:spPr>
+        <p:txBody>
+          <a:bodyPr wrap="square">
+            <a:spAutoFit/>
+          </a:bodyPr>
+          <a:lstStyle/>
+          <a:p>
+            <a:pPr algn="ctr"/>
+            <a:r>
+              <a:rPr sz="4800" b="1" i="0">
                 <a:solidFill>
                   <a:srgbClr val="FFFFFF"/>
                 </a:solidFill>
                 <a:latin typeface="Arial"/>
               </a:rPr>
               <a:t>Cada coisa que antes me prendia</a:t>
-            </a:r>
-          </a:p>
-        </p:txBody>
-      </p:sp>
-      <p:sp>
-        <p:nvSpPr>
-          <p:cNvPr id="5" name="TextBox 4"/>
-          <p:cNvSpPr txBox="1"/>
-          <p:nvPr/>
-        </p:nvSpPr>
-        <p:spPr>
-          <a:xfrm>
-            <a:off x="594360" y="4251960"/>
-            <a:ext cx="11002975" cy="347472"/>
-          </a:xfrm>
-          <a:prstGeom prst="rect">
-            <a:avLst/>
-          </a:prstGeom>
-          <a:noFill/>
-        </p:spPr>
-        <p:txBody>
-          <a:bodyPr wrap="square">
-            <a:spAutoFit/>
-          </a:bodyPr>
-          <a:lstStyle/>
-          <a:p>
-            <a:pPr algn="ctr"/>
-            <a:r>
-              <a:rPr sz="2200" b="0" i="1">
-                <a:solidFill>
-                  <a:srgbClr val="8C8C8C"/>
-                </a:solidFill>
-                <a:latin typeface="Arial"/>
-              </a:rPr>
-              <a:t/>
             </a:r>
           </a:p>
         </p:txBody>
@@ -5019,23 +4319,23 @@
         </p:nvSpPr>
         <p:spPr>
           <a:xfrm>
-            <a:off x="594360" y="1837944"/>
-            <a:ext cx="11002975" cy="685800"/>
-          </a:xfrm>
-          <a:prstGeom prst="rect">
-            <a:avLst/>
-          </a:prstGeom>
-          <a:noFill/>
-        </p:spPr>
-        <p:txBody>
-          <a:bodyPr wrap="square">
-            <a:spAutoFit/>
-          </a:bodyPr>
-          <a:lstStyle/>
-          <a:p>
-            <a:pPr algn="ctr"/>
-            <a:r>
-              <a:rPr sz="4400" b="1" i="0">
+            <a:off x="640080" y="1650492"/>
+            <a:ext cx="10911535" cy="731520"/>
+          </a:xfrm>
+          <a:prstGeom prst="rect">
+            <a:avLst/>
+          </a:prstGeom>
+          <a:noFill/>
+        </p:spPr>
+        <p:txBody>
+          <a:bodyPr wrap="square">
+            <a:spAutoFit/>
+          </a:bodyPr>
+          <a:lstStyle/>
+          <a:p>
+            <a:pPr algn="ctr"/>
+            <a:r>
+              <a:rPr sz="4800" b="1" i="0">
                 <a:solidFill>
                   <a:srgbClr val="FFFFFF"/>
                 </a:solidFill>
@@ -5054,8 +4354,8 @@
         </p:nvSpPr>
         <p:spPr>
           <a:xfrm>
-            <a:off x="594360" y="2560320"/>
-            <a:ext cx="11002975" cy="384048"/>
+            <a:off x="640080" y="2418588"/>
+            <a:ext cx="10911535" cy="365760"/>
           </a:xfrm>
           <a:prstGeom prst="rect">
             <a:avLst/>
@@ -5072,7 +4372,7 @@
             <a:r>
               <a:rPr sz="2400" b="0" i="1">
                 <a:solidFill>
-                  <a:srgbClr val="B4B4B4"/>
+                  <a:srgbClr val="AAAAAA"/>
                 </a:solidFill>
                 <a:latin typeface="Arial"/>
               </a:rPr>
@@ -5089,8 +4389,78 @@
         </p:nvSpPr>
         <p:spPr>
           <a:xfrm>
-            <a:off x="594360" y="2980944"/>
-            <a:ext cx="11002975" cy="347472"/>
+            <a:off x="640080" y="2985516"/>
+            <a:ext cx="10911535" cy="731520"/>
+          </a:xfrm>
+          <a:prstGeom prst="rect">
+            <a:avLst/>
+          </a:prstGeom>
+          <a:noFill/>
+        </p:spPr>
+        <p:txBody>
+          <a:bodyPr wrap="square">
+            <a:spAutoFit/>
+          </a:bodyPr>
+          <a:lstStyle/>
+          <a:p>
+            <a:pPr algn="ctr"/>
+            <a:r>
+              <a:rPr sz="4800" b="1" i="0">
+                <a:solidFill>
+                  <a:srgbClr val="FFFFFF"/>
+                </a:solidFill>
+                <a:latin typeface="Arial"/>
+              </a:rPr>
+              <a:t>主の愛の他に  望みはな-い</a:t>
+            </a:r>
+          </a:p>
+        </p:txBody>
+      </p:sp>
+      <p:sp>
+        <p:nvSpPr>
+          <p:cNvPr id="5" name="TextBox 4"/>
+          <p:cNvSpPr txBox="1"/>
+          <p:nvPr/>
+        </p:nvSpPr>
+        <p:spPr>
+          <a:xfrm>
+            <a:off x="640080" y="3753612"/>
+            <a:ext cx="10911535" cy="365760"/>
+          </a:xfrm>
+          <a:prstGeom prst="rect">
+            <a:avLst/>
+          </a:prstGeom>
+          <a:noFill/>
+        </p:spPr>
+        <p:txBody>
+          <a:bodyPr wrap="square">
+            <a:spAutoFit/>
+          </a:bodyPr>
+          <a:lstStyle/>
+          <a:p>
+            <a:pPr algn="ctr"/>
+            <a:r>
+              <a:rPr sz="2400" b="0" i="1">
+                <a:solidFill>
+                  <a:srgbClr val="AAAAAA"/>
+                </a:solidFill>
+                <a:latin typeface="Arial"/>
+              </a:rPr>
+              <a:t>Shu no ai no hoka ni  nozomi wa nai</a:t>
+            </a:r>
+          </a:p>
+        </p:txBody>
+      </p:sp>
+      <p:sp>
+        <p:nvSpPr>
+          <p:cNvPr id="6" name="TextBox 5"/>
+          <p:cNvSpPr txBox="1"/>
+          <p:nvPr/>
+        </p:nvSpPr>
+        <p:spPr>
+          <a:xfrm>
+            <a:off x="640080" y="4530852"/>
+            <a:ext cx="10911535" cy="310896"/>
           </a:xfrm>
           <a:prstGeom prst="rect">
             <a:avLst/>
@@ -5107,81 +4477,11 @@
             <a:r>
               <a:rPr sz="2000" b="0" i="1">
                 <a:solidFill>
-                  <a:srgbClr val="8C8C8C"/>
-                </a:solidFill>
-                <a:latin typeface="Arial"/>
-              </a:rPr>
-              <a:t/>
-            </a:r>
-          </a:p>
-        </p:txBody>
-      </p:sp>
-      <p:sp>
-        <p:nvSpPr>
-          <p:cNvPr id="5" name="TextBox 4"/>
-          <p:cNvSpPr txBox="1"/>
-          <p:nvPr/>
-        </p:nvSpPr>
-        <p:spPr>
-          <a:xfrm>
-            <a:off x="594360" y="3529584"/>
-            <a:ext cx="11002975" cy="685800"/>
-          </a:xfrm>
-          <a:prstGeom prst="rect">
-            <a:avLst/>
-          </a:prstGeom>
-          <a:noFill/>
-        </p:spPr>
-        <p:txBody>
-          <a:bodyPr wrap="square">
-            <a:spAutoFit/>
-          </a:bodyPr>
-          <a:lstStyle/>
-          <a:p>
-            <a:pPr algn="ctr"/>
-            <a:r>
-              <a:rPr sz="4400" b="1" i="0">
-                <a:solidFill>
-                  <a:srgbClr val="FFFFFF"/>
-                </a:solidFill>
-                <a:latin typeface="Arial"/>
-              </a:rPr>
-              <a:t>主の愛の他に  望みはな-い</a:t>
-            </a:r>
-          </a:p>
-        </p:txBody>
-      </p:sp>
-      <p:sp>
-        <p:nvSpPr>
-          <p:cNvPr id="6" name="TextBox 5"/>
-          <p:cNvSpPr txBox="1"/>
-          <p:nvPr/>
-        </p:nvSpPr>
-        <p:spPr>
-          <a:xfrm>
-            <a:off x="594360" y="4251960"/>
-            <a:ext cx="11002975" cy="384048"/>
-          </a:xfrm>
-          <a:prstGeom prst="rect">
-            <a:avLst/>
-          </a:prstGeom>
-          <a:noFill/>
-        </p:spPr>
-        <p:txBody>
-          <a:bodyPr wrap="square">
-            <a:spAutoFit/>
-          </a:bodyPr>
-          <a:lstStyle/>
-          <a:p>
-            <a:pPr algn="ctr"/>
-            <a:r>
-              <a:rPr sz="2400" b="0" i="1">
-                <a:solidFill>
-                  <a:srgbClr val="B4B4B4"/>
-                </a:solidFill>
-                <a:latin typeface="Arial"/>
-              </a:rPr>
-              <a:t>Shu no ai no hoka ni  nozomi wa nai</a:t>
+                  <a:srgbClr val="828282"/>
+                </a:solidFill>
+                <a:latin typeface="Arial"/>
+              </a:rPr>
+              <a:t>Mas pensava que sabia o caminho</a:t>
             </a:r>
           </a:p>
         </p:txBody>
@@ -5194,8 +4494,8 @@
         </p:nvSpPr>
         <p:spPr>
           <a:xfrm>
-            <a:off x="594360" y="4672584"/>
-            <a:ext cx="11002975" cy="347472"/>
+            <a:off x="640080" y="4896612"/>
+            <a:ext cx="10911535" cy="310896"/>
           </a:xfrm>
           <a:prstGeom prst="rect">
             <a:avLst/>
@@ -5212,11 +4512,11 @@
             <a:r>
               <a:rPr sz="2000" b="0" i="1">
                 <a:solidFill>
-                  <a:srgbClr val="8C8C8C"/>
-                </a:solidFill>
-                <a:latin typeface="Arial"/>
-              </a:rPr>
-              <a:t/>
+                  <a:srgbClr val="828282"/>
+                </a:solidFill>
+                <a:latin typeface="Arial"/>
+              </a:rPr>
+              <a:t>O pecado prometia alegria e vida</a:t>
             </a:r>
           </a:p>
         </p:txBody>
@@ -5255,23 +4555,23 @@
         </p:nvSpPr>
         <p:spPr>
           <a:xfrm>
-            <a:off x="594360" y="2258568"/>
-            <a:ext cx="11002975" cy="685800"/>
-          </a:xfrm>
-          <a:prstGeom prst="rect">
-            <a:avLst/>
-          </a:prstGeom>
-          <a:noFill/>
-        </p:spPr>
-        <p:txBody>
-          <a:bodyPr wrap="square">
-            <a:spAutoFit/>
-          </a:bodyPr>
-          <a:lstStyle/>
-          <a:p>
-            <a:pPr algn="ctr"/>
-            <a:r>
-              <a:rPr sz="4400" b="1" i="0">
+            <a:off x="640080" y="2052828"/>
+            <a:ext cx="10911535" cy="731520"/>
+          </a:xfrm>
+          <a:prstGeom prst="rect">
+            <a:avLst/>
+          </a:prstGeom>
+          <a:noFill/>
+        </p:spPr>
+        <p:txBody>
+          <a:bodyPr wrap="square">
+            <a:spAutoFit/>
+          </a:bodyPr>
+          <a:lstStyle/>
+          <a:p>
+            <a:pPr algn="ctr"/>
+            <a:r>
+              <a:rPr sz="4800" b="1" i="0">
                 <a:solidFill>
                   <a:srgbClr val="FFFFFF"/>
                 </a:solidFill>
@@ -5290,99 +4590,29 @@
         </p:nvSpPr>
         <p:spPr>
           <a:xfrm>
-            <a:off x="594360" y="2980944"/>
-            <a:ext cx="11002975" cy="347472"/>
-          </a:xfrm>
-          <a:prstGeom prst="rect">
-            <a:avLst/>
-          </a:prstGeom>
-          <a:noFill/>
-        </p:spPr>
-        <p:txBody>
-          <a:bodyPr wrap="square">
-            <a:spAutoFit/>
-          </a:bodyPr>
-          <a:lstStyle/>
-          <a:p>
-            <a:pPr algn="ctr"/>
-            <a:r>
-              <a:rPr sz="2200" b="0" i="1">
-                <a:solidFill>
-                  <a:srgbClr val="8C8C8C"/>
-                </a:solidFill>
-                <a:latin typeface="Arial"/>
-              </a:rPr>
-              <a:t/>
-            </a:r>
-          </a:p>
-        </p:txBody>
-      </p:sp>
-      <p:sp>
-        <p:nvSpPr>
-          <p:cNvPr id="4" name="TextBox 3"/>
-          <p:cNvSpPr txBox="1"/>
-          <p:nvPr/>
-        </p:nvSpPr>
-        <p:spPr>
-          <a:xfrm>
-            <a:off x="594360" y="3529584"/>
-            <a:ext cx="11002975" cy="685800"/>
-          </a:xfrm>
-          <a:prstGeom prst="rect">
-            <a:avLst/>
-          </a:prstGeom>
-          <a:noFill/>
-        </p:spPr>
-        <p:txBody>
-          <a:bodyPr wrap="square">
-            <a:spAutoFit/>
-          </a:bodyPr>
-          <a:lstStyle/>
-          <a:p>
-            <a:pPr algn="ctr"/>
-            <a:r>
-              <a:rPr sz="4400" b="1" i="0">
+            <a:off x="640080" y="2985516"/>
+            <a:ext cx="10911535" cy="731520"/>
+          </a:xfrm>
+          <a:prstGeom prst="rect">
+            <a:avLst/>
+          </a:prstGeom>
+          <a:noFill/>
+        </p:spPr>
+        <p:txBody>
+          <a:bodyPr wrap="square">
+            <a:spAutoFit/>
+          </a:bodyPr>
+          <a:lstStyle/>
+          <a:p>
+            <a:pPr algn="ctr"/>
+            <a:r>
+              <a:rPr sz="4800" b="1" i="0">
                 <a:solidFill>
                   <a:srgbClr val="FFFFFF"/>
                 </a:solidFill>
                 <a:latin typeface="Arial"/>
               </a:rPr>
               <a:t>Senão estar em Ti para sempre</a:t>
-            </a:r>
-          </a:p>
-        </p:txBody>
-      </p:sp>
-      <p:sp>
-        <p:nvSpPr>
-          <p:cNvPr id="5" name="TextBox 4"/>
-          <p:cNvSpPr txBox="1"/>
-          <p:nvPr/>
-        </p:nvSpPr>
-        <p:spPr>
-          <a:xfrm>
-            <a:off x="594360" y="4251960"/>
-            <a:ext cx="11002975" cy="347472"/>
-          </a:xfrm>
-          <a:prstGeom prst="rect">
-            <a:avLst/>
-          </a:prstGeom>
-          <a:noFill/>
-        </p:spPr>
-        <p:txBody>
-          <a:bodyPr wrap="square">
-            <a:spAutoFit/>
-          </a:bodyPr>
-          <a:lstStyle/>
-          <a:p>
-            <a:pPr algn="ctr"/>
-            <a:r>
-              <a:rPr sz="2200" b="0" i="1">
-                <a:solidFill>
-                  <a:srgbClr val="8C8C8C"/>
-                </a:solidFill>
-                <a:latin typeface="Arial"/>
-              </a:rPr>
-              <a:t/>
             </a:r>
           </a:p>
         </p:txBody>
@@ -5421,23 +4651,23 @@
         </p:nvSpPr>
         <p:spPr>
           <a:xfrm>
-            <a:off x="594360" y="1837944"/>
-            <a:ext cx="11002975" cy="685800"/>
-          </a:xfrm>
-          <a:prstGeom prst="rect">
-            <a:avLst/>
-          </a:prstGeom>
-          <a:noFill/>
-        </p:spPr>
-        <p:txBody>
-          <a:bodyPr wrap="square">
-            <a:spAutoFit/>
-          </a:bodyPr>
-          <a:lstStyle/>
-          <a:p>
-            <a:pPr algn="ctr"/>
-            <a:r>
-              <a:rPr sz="4400" b="1" i="0">
+            <a:off x="640080" y="1650492"/>
+            <a:ext cx="10911535" cy="731520"/>
+          </a:xfrm>
+          <a:prstGeom prst="rect">
+            <a:avLst/>
+          </a:prstGeom>
+          <a:noFill/>
+        </p:spPr>
+        <p:txBody>
+          <a:bodyPr wrap="square">
+            <a:spAutoFit/>
+          </a:bodyPr>
+          <a:lstStyle/>
+          <a:p>
+            <a:pPr algn="ctr"/>
+            <a:r>
+              <a:rPr sz="4800" b="1" i="0">
                 <a:solidFill>
                   <a:srgbClr val="FFFFFF"/>
                 </a:solidFill>
@@ -5456,8 +4686,8 @@
         </p:nvSpPr>
         <p:spPr>
           <a:xfrm>
-            <a:off x="594360" y="2560320"/>
-            <a:ext cx="11002975" cy="384048"/>
+            <a:off x="640080" y="2418588"/>
+            <a:ext cx="10911535" cy="365760"/>
           </a:xfrm>
           <a:prstGeom prst="rect">
             <a:avLst/>
@@ -5474,7 +4704,7 @@
             <a:r>
               <a:rPr sz="2400" b="0" i="1">
                 <a:solidFill>
-                  <a:srgbClr val="B4B4B4"/>
+                  <a:srgbClr val="AAAAAA"/>
                 </a:solidFill>
                 <a:latin typeface="Arial"/>
               </a:rPr>
@@ -5491,8 +4721,78 @@
         </p:nvSpPr>
         <p:spPr>
           <a:xfrm>
-            <a:off x="594360" y="2980944"/>
-            <a:ext cx="11002975" cy="347472"/>
+            <a:off x="640080" y="2985516"/>
+            <a:ext cx="10911535" cy="731520"/>
+          </a:xfrm>
+          <a:prstGeom prst="rect">
+            <a:avLst/>
+          </a:prstGeom>
+          <a:noFill/>
+        </p:spPr>
+        <p:txBody>
+          <a:bodyPr wrap="square">
+            <a:spAutoFit/>
+          </a:bodyPr>
+          <a:lstStyle/>
+          <a:p>
+            <a:pPr algn="ctr"/>
+            <a:r>
+              <a:rPr sz="4800" b="1" i="0">
+                <a:solidFill>
+                  <a:srgbClr val="FFFFFF"/>
+                </a:solidFill>
+                <a:latin typeface="Arial"/>
+              </a:rPr>
+              <a:t>導いてくれた  十字架へと</a:t>
+            </a:r>
+          </a:p>
+        </p:txBody>
+      </p:sp>
+      <p:sp>
+        <p:nvSpPr>
+          <p:cNvPr id="5" name="TextBox 4"/>
+          <p:cNvSpPr txBox="1"/>
+          <p:nvPr/>
+        </p:nvSpPr>
+        <p:spPr>
+          <a:xfrm>
+            <a:off x="640080" y="3753612"/>
+            <a:ext cx="10911535" cy="365760"/>
+          </a:xfrm>
+          <a:prstGeom prst="rect">
+            <a:avLst/>
+          </a:prstGeom>
+          <a:noFill/>
+        </p:spPr>
+        <p:txBody>
+          <a:bodyPr wrap="square">
+            <a:spAutoFit/>
+          </a:bodyPr>
+          <a:lstStyle/>
+          <a:p>
+            <a:pPr algn="ctr"/>
+            <a:r>
+              <a:rPr sz="2400" b="0" i="1">
+                <a:solidFill>
+                  <a:srgbClr val="AAAAAA"/>
+                </a:solidFill>
+                <a:latin typeface="Arial"/>
+              </a:rPr>
+              <a:t>michibiite kureta  juujika he to</a:t>
+            </a:r>
+          </a:p>
+        </p:txBody>
+      </p:sp>
+      <p:sp>
+        <p:nvSpPr>
+          <p:cNvPr id="6" name="TextBox 5"/>
+          <p:cNvSpPr txBox="1"/>
+          <p:nvPr/>
+        </p:nvSpPr>
+        <p:spPr>
+          <a:xfrm>
+            <a:off x="640080" y="4530852"/>
+            <a:ext cx="10911535" cy="310896"/>
           </a:xfrm>
           <a:prstGeom prst="rect">
             <a:avLst/>
@@ -5509,81 +4809,11 @@
             <a:r>
               <a:rPr sz="2000" b="0" i="1">
                 <a:solidFill>
-                  <a:srgbClr val="8C8C8C"/>
-                </a:solidFill>
-                <a:latin typeface="Arial"/>
-              </a:rPr>
-              <a:t/>
-            </a:r>
-          </a:p>
-        </p:txBody>
-      </p:sp>
-      <p:sp>
-        <p:nvSpPr>
-          <p:cNvPr id="5" name="TextBox 4"/>
-          <p:cNvSpPr txBox="1"/>
-          <p:nvPr/>
-        </p:nvSpPr>
-        <p:spPr>
-          <a:xfrm>
-            <a:off x="594360" y="3529584"/>
-            <a:ext cx="11002975" cy="685800"/>
-          </a:xfrm>
-          <a:prstGeom prst="rect">
-            <a:avLst/>
-          </a:prstGeom>
-          <a:noFill/>
-        </p:spPr>
-        <p:txBody>
-          <a:bodyPr wrap="square">
-            <a:spAutoFit/>
-          </a:bodyPr>
-          <a:lstStyle/>
-          <a:p>
-            <a:pPr algn="ctr"/>
-            <a:r>
-              <a:rPr sz="4400" b="1" i="0">
-                <a:solidFill>
-                  <a:srgbClr val="FFFFFF"/>
-                </a:solidFill>
-                <a:latin typeface="Arial"/>
-              </a:rPr>
-              <a:t>導いてくれた  十字架へと</a:t>
-            </a:r>
-          </a:p>
-        </p:txBody>
-      </p:sp>
-      <p:sp>
-        <p:nvSpPr>
-          <p:cNvPr id="6" name="TextBox 5"/>
-          <p:cNvSpPr txBox="1"/>
-          <p:nvPr/>
-        </p:nvSpPr>
-        <p:spPr>
-          <a:xfrm>
-            <a:off x="594360" y="4251960"/>
-            <a:ext cx="11002975" cy="384048"/>
-          </a:xfrm>
-          <a:prstGeom prst="rect">
-            <a:avLst/>
-          </a:prstGeom>
-          <a:noFill/>
-        </p:spPr>
-        <p:txBody>
-          <a:bodyPr wrap="square">
-            <a:spAutoFit/>
-          </a:bodyPr>
-          <a:lstStyle/>
-          <a:p>
-            <a:pPr algn="ctr"/>
-            <a:r>
-              <a:rPr sz="2400" b="0" i="1">
-                <a:solidFill>
-                  <a:srgbClr val="B4B4B4"/>
-                </a:solidFill>
-                <a:latin typeface="Arial"/>
-              </a:rPr>
-              <a:t>michibiite kureta  juujika he to</a:t>
+                  <a:srgbClr val="828282"/>
+                </a:solidFill>
+                <a:latin typeface="Arial"/>
+              </a:rPr>
+              <a:t>Tudo que Eu Tenho é Cristo</a:t>
             </a:r>
           </a:p>
         </p:txBody>
@@ -5596,8 +4826,8 @@
         </p:nvSpPr>
         <p:spPr>
           <a:xfrm>
-            <a:off x="594360" y="4672584"/>
-            <a:ext cx="11002975" cy="347472"/>
+            <a:off x="640080" y="4896612"/>
+            <a:ext cx="10911535" cy="310896"/>
           </a:xfrm>
           <a:prstGeom prst="rect">
             <a:avLst/>
@@ -5614,11 +4844,11 @@
             <a:r>
               <a:rPr sz="2000" b="0" i="1">
                 <a:solidFill>
-                  <a:srgbClr val="8C8C8C"/>
-                </a:solidFill>
-                <a:latin typeface="Arial"/>
-              </a:rPr>
-              <a:t/>
+                  <a:srgbClr val="828282"/>
+                </a:solidFill>
+                <a:latin typeface="Arial"/>
+              </a:rPr>
+              <a:t>Eu estava perdido na mais escura noite</a:t>
             </a:r>
           </a:p>
         </p:txBody>
@@ -5657,23 +4887,23 @@
         </p:nvSpPr>
         <p:spPr>
           <a:xfrm>
-            <a:off x="594360" y="1837944"/>
-            <a:ext cx="11002975" cy="685800"/>
-          </a:xfrm>
-          <a:prstGeom prst="rect">
-            <a:avLst/>
-          </a:prstGeom>
-          <a:noFill/>
-        </p:spPr>
-        <p:txBody>
-          <a:bodyPr wrap="square">
-            <a:spAutoFit/>
-          </a:bodyPr>
-          <a:lstStyle/>
-          <a:p>
-            <a:pPr algn="ctr"/>
-            <a:r>
-              <a:rPr sz="4400" b="1" i="0">
+            <a:off x="640080" y="1650492"/>
+            <a:ext cx="10911535" cy="731520"/>
+          </a:xfrm>
+          <a:prstGeom prst="rect">
+            <a:avLst/>
+          </a:prstGeom>
+          <a:noFill/>
+        </p:spPr>
+        <p:txBody>
+          <a:bodyPr wrap="square">
+            <a:spAutoFit/>
+          </a:bodyPr>
+          <a:lstStyle/>
+          <a:p>
+            <a:pPr algn="ctr"/>
+            <a:r>
+              <a:rPr sz="4800" b="1" i="0">
                 <a:solidFill>
                   <a:srgbClr val="FFFFFF"/>
                 </a:solidFill>
@@ -5692,8 +4922,8 @@
         </p:nvSpPr>
         <p:spPr>
           <a:xfrm>
-            <a:off x="594360" y="2560320"/>
-            <a:ext cx="11002975" cy="384048"/>
+            <a:off x="640080" y="2418588"/>
+            <a:ext cx="10911535" cy="365760"/>
           </a:xfrm>
           <a:prstGeom prst="rect">
             <a:avLst/>
@@ -5710,7 +4940,7 @@
             <a:r>
               <a:rPr sz="2400" b="0" i="1">
                 <a:solidFill>
-                  <a:srgbClr val="B4B4B4"/>
+                  <a:srgbClr val="AAAAAA"/>
                 </a:solidFill>
                 <a:latin typeface="Arial"/>
               </a:rPr>
@@ -5727,8 +4957,78 @@
         </p:nvSpPr>
         <p:spPr>
           <a:xfrm>
-            <a:off x="594360" y="2980944"/>
-            <a:ext cx="11002975" cy="347472"/>
+            <a:off x="640080" y="2985516"/>
+            <a:ext cx="10911535" cy="731520"/>
+          </a:xfrm>
+          <a:prstGeom prst="rect">
+            <a:avLst/>
+          </a:prstGeom>
+          <a:noFill/>
+        </p:spPr>
+        <p:txBody>
+          <a:bodyPr wrap="square">
+            <a:spAutoFit/>
+          </a:bodyPr>
+          <a:lstStyle/>
+          <a:p>
+            <a:pPr algn="ctr"/>
+            <a:r>
+              <a:rPr sz="4800" b="1" i="0">
+                <a:solidFill>
+                  <a:srgbClr val="FFFFFF"/>
+                </a:solidFill>
+                <a:latin typeface="Arial"/>
+              </a:rPr>
+              <a:t>かかげた  大きな愛と恵 - み</a:t>
+            </a:r>
+          </a:p>
+        </p:txBody>
+      </p:sp>
+      <p:sp>
+        <p:nvSpPr>
+          <p:cNvPr id="5" name="TextBox 4"/>
+          <p:cNvSpPr txBox="1"/>
+          <p:nvPr/>
+        </p:nvSpPr>
+        <p:spPr>
+          <a:xfrm>
+            <a:off x="640080" y="3753612"/>
+            <a:ext cx="10911535" cy="365760"/>
+          </a:xfrm>
+          <a:prstGeom prst="rect">
+            <a:avLst/>
+          </a:prstGeom>
+          <a:noFill/>
+        </p:spPr>
+        <p:txBody>
+          <a:bodyPr wrap="square">
+            <a:spAutoFit/>
+          </a:bodyPr>
+          <a:lstStyle/>
+          <a:p>
+            <a:pPr algn="ctr"/>
+            <a:r>
+              <a:rPr sz="2400" b="0" i="1">
+                <a:solidFill>
+                  <a:srgbClr val="AAAAAA"/>
+                </a:solidFill>
+                <a:latin typeface="Arial"/>
+              </a:rPr>
+              <a:t>kakageta  ookina  ai to megumi</a:t>
+            </a:r>
+          </a:p>
+        </p:txBody>
+      </p:sp>
+      <p:sp>
+        <p:nvSpPr>
+          <p:cNvPr id="6" name="TextBox 5"/>
+          <p:cNvSpPr txBox="1"/>
+          <p:nvPr/>
+        </p:nvSpPr>
+        <p:spPr>
+          <a:xfrm>
+            <a:off x="640080" y="4530852"/>
+            <a:ext cx="10911535" cy="310896"/>
           </a:xfrm>
           <a:prstGeom prst="rect">
             <a:avLst/>
@@ -5745,81 +5045,11 @@
             <a:r>
               <a:rPr sz="2000" b="0" i="1">
                 <a:solidFill>
-                  <a:srgbClr val="8C8C8C"/>
-                </a:solidFill>
-                <a:latin typeface="Arial"/>
-              </a:rPr>
-              <a:t/>
-            </a:r>
-          </a:p>
-        </p:txBody>
-      </p:sp>
-      <p:sp>
-        <p:nvSpPr>
-          <p:cNvPr id="5" name="TextBox 4"/>
-          <p:cNvSpPr txBox="1"/>
-          <p:nvPr/>
-        </p:nvSpPr>
-        <p:spPr>
-          <a:xfrm>
-            <a:off x="594360" y="3529584"/>
-            <a:ext cx="11002975" cy="685800"/>
-          </a:xfrm>
-          <a:prstGeom prst="rect">
-            <a:avLst/>
-          </a:prstGeom>
-          <a:noFill/>
-        </p:spPr>
-        <p:txBody>
-          <a:bodyPr wrap="square">
-            <a:spAutoFit/>
-          </a:bodyPr>
-          <a:lstStyle/>
-          <a:p>
-            <a:pPr algn="ctr"/>
-            <a:r>
-              <a:rPr sz="4400" b="1" i="0">
-                <a:solidFill>
-                  <a:srgbClr val="FFFFFF"/>
-                </a:solidFill>
-                <a:latin typeface="Arial"/>
-              </a:rPr>
-              <a:t>かかげた  大きな愛と恵 - み</a:t>
-            </a:r>
-          </a:p>
-        </p:txBody>
-      </p:sp>
-      <p:sp>
-        <p:nvSpPr>
-          <p:cNvPr id="6" name="TextBox 5"/>
-          <p:cNvSpPr txBox="1"/>
-          <p:nvPr/>
-        </p:nvSpPr>
-        <p:spPr>
-          <a:xfrm>
-            <a:off x="594360" y="4251960"/>
-            <a:ext cx="11002975" cy="384048"/>
-          </a:xfrm>
-          <a:prstGeom prst="rect">
-            <a:avLst/>
-          </a:prstGeom>
-          <a:noFill/>
-        </p:spPr>
-        <p:txBody>
-          <a:bodyPr wrap="square">
-            <a:spAutoFit/>
-          </a:bodyPr>
-          <a:lstStyle/>
-          <a:p>
-            <a:pPr algn="ctr"/>
-            <a:r>
-              <a:rPr sz="2400" b="0" i="1">
-                <a:solidFill>
-                  <a:srgbClr val="B4B4B4"/>
-                </a:solidFill>
-                <a:latin typeface="Arial"/>
-              </a:rPr>
-              <a:t>kakageta  ookina  ai to megumi</a:t>
+                  <a:srgbClr val="828282"/>
+                </a:solidFill>
+                <a:latin typeface="Arial"/>
+              </a:rPr>
+              <a:t>Mas pensava que sabia o caminho</a:t>
             </a:r>
           </a:p>
         </p:txBody>
@@ -5832,8 +5062,8 @@
         </p:nvSpPr>
         <p:spPr>
           <a:xfrm>
-            <a:off x="594360" y="4672584"/>
-            <a:ext cx="11002975" cy="347472"/>
+            <a:off x="640080" y="4896612"/>
+            <a:ext cx="10911535" cy="310896"/>
           </a:xfrm>
           <a:prstGeom prst="rect">
             <a:avLst/>
@@ -5850,11 +5080,11 @@
             <a:r>
               <a:rPr sz="2000" b="0" i="1">
                 <a:solidFill>
-                  <a:srgbClr val="8C8C8C"/>
-                </a:solidFill>
-                <a:latin typeface="Arial"/>
-              </a:rPr>
-              <a:t/>
+                  <a:srgbClr val="828282"/>
+                </a:solidFill>
+                <a:latin typeface="Arial"/>
+              </a:rPr>
+              <a:t>O pecado prometia alegria e vida</a:t>
             </a:r>
           </a:p>
         </p:txBody>
@@ -5893,23 +5123,23 @@
         </p:nvSpPr>
         <p:spPr>
           <a:xfrm>
-            <a:off x="594360" y="1837944"/>
-            <a:ext cx="11002975" cy="685800"/>
-          </a:xfrm>
-          <a:prstGeom prst="rect">
-            <a:avLst/>
-          </a:prstGeom>
-          <a:noFill/>
-        </p:spPr>
-        <p:txBody>
-          <a:bodyPr wrap="square">
-            <a:spAutoFit/>
-          </a:bodyPr>
-          <a:lstStyle/>
-          <a:p>
-            <a:pPr algn="ctr"/>
-            <a:r>
-              <a:rPr sz="4400" b="1" i="0">
+            <a:off x="640080" y="1650492"/>
+            <a:ext cx="10911535" cy="731520"/>
+          </a:xfrm>
+          <a:prstGeom prst="rect">
+            <a:avLst/>
+          </a:prstGeom>
+          <a:noFill/>
+        </p:spPr>
+        <p:txBody>
+          <a:bodyPr wrap="square">
+            <a:spAutoFit/>
+          </a:bodyPr>
+          <a:lstStyle/>
+          <a:p>
+            <a:pPr algn="ctr"/>
+            <a:r>
+              <a:rPr sz="4800" b="1" i="0">
                 <a:solidFill>
                   <a:srgbClr val="FFFFFF"/>
                 </a:solidFill>
@@ -5928,8 +5158,8 @@
         </p:nvSpPr>
         <p:spPr>
           <a:xfrm>
-            <a:off x="594360" y="2560320"/>
-            <a:ext cx="11002975" cy="384048"/>
+            <a:off x="640080" y="2418588"/>
+            <a:ext cx="10911535" cy="365760"/>
           </a:xfrm>
           <a:prstGeom prst="rect">
             <a:avLst/>
@@ -5946,7 +5176,7 @@
             <a:r>
               <a:rPr sz="2400" b="0" i="1">
                 <a:solidFill>
-                  <a:srgbClr val="B4B4B4"/>
+                  <a:srgbClr val="AAAAAA"/>
                 </a:solidFill>
                 <a:latin typeface="Arial"/>
               </a:rPr>
@@ -5963,8 +5193,78 @@
         </p:nvSpPr>
         <p:spPr>
           <a:xfrm>
-            <a:off x="594360" y="2980944"/>
-            <a:ext cx="11002975" cy="347472"/>
+            <a:off x="640080" y="2985516"/>
+            <a:ext cx="10911535" cy="731520"/>
+          </a:xfrm>
+          <a:prstGeom prst="rect">
+            <a:avLst/>
+          </a:prstGeom>
+          <a:noFill/>
+        </p:spPr>
+        <p:txBody>
+          <a:bodyPr wrap="square">
+            <a:spAutoFit/>
+          </a:bodyPr>
+          <a:lstStyle/>
+          <a:p>
+            <a:pPr algn="ctr"/>
+            <a:r>
+              <a:rPr sz="4800" b="1" i="0">
+                <a:solidFill>
+                  <a:srgbClr val="FFFFFF"/>
+                </a:solidFill>
+                <a:latin typeface="Arial"/>
+              </a:rPr>
+              <a:t>ハレル - ヤ  我がすべて</a:t>
+            </a:r>
+          </a:p>
+        </p:txBody>
+      </p:sp>
+      <p:sp>
+        <p:nvSpPr>
+          <p:cNvPr id="5" name="TextBox 4"/>
+          <p:cNvSpPr txBox="1"/>
+          <p:nvPr/>
+        </p:nvSpPr>
+        <p:spPr>
+          <a:xfrm>
+            <a:off x="640080" y="3753612"/>
+            <a:ext cx="10911535" cy="365760"/>
+          </a:xfrm>
+          <a:prstGeom prst="rect">
+            <a:avLst/>
+          </a:prstGeom>
+          <a:noFill/>
+        </p:spPr>
+        <p:txBody>
+          <a:bodyPr wrap="square">
+            <a:spAutoFit/>
+          </a:bodyPr>
+          <a:lstStyle/>
+          <a:p>
+            <a:pPr algn="ctr"/>
+            <a:r>
+              <a:rPr sz="2400" b="0" i="1">
+                <a:solidFill>
+                  <a:srgbClr val="AAAAAA"/>
+                </a:solidFill>
+                <a:latin typeface="Arial"/>
+              </a:rPr>
+              <a:t>halleluya wa ga subete</a:t>
+            </a:r>
+          </a:p>
+        </p:txBody>
+      </p:sp>
+      <p:sp>
+        <p:nvSpPr>
+          <p:cNvPr id="6" name="TextBox 5"/>
+          <p:cNvSpPr txBox="1"/>
+          <p:nvPr/>
+        </p:nvSpPr>
+        <p:spPr>
+          <a:xfrm>
+            <a:off x="640080" y="4530852"/>
+            <a:ext cx="10911535" cy="310896"/>
           </a:xfrm>
           <a:prstGeom prst="rect">
             <a:avLst/>
@@ -5981,81 +5281,11 @@
             <a:r>
               <a:rPr sz="2000" b="0" i="1">
                 <a:solidFill>
-                  <a:srgbClr val="8C8C8C"/>
-                </a:solidFill>
-                <a:latin typeface="Arial"/>
-              </a:rPr>
-              <a:t/>
-            </a:r>
-          </a:p>
-        </p:txBody>
-      </p:sp>
-      <p:sp>
-        <p:nvSpPr>
-          <p:cNvPr id="5" name="TextBox 4"/>
-          <p:cNvSpPr txBox="1"/>
-          <p:nvPr/>
-        </p:nvSpPr>
-        <p:spPr>
-          <a:xfrm>
-            <a:off x="594360" y="3529584"/>
-            <a:ext cx="11002975" cy="685800"/>
-          </a:xfrm>
-          <a:prstGeom prst="rect">
-            <a:avLst/>
-          </a:prstGeom>
-          <a:noFill/>
-        </p:spPr>
-        <p:txBody>
-          <a:bodyPr wrap="square">
-            <a:spAutoFit/>
-          </a:bodyPr>
-          <a:lstStyle/>
-          <a:p>
-            <a:pPr algn="ctr"/>
-            <a:r>
-              <a:rPr sz="4400" b="1" i="0">
-                <a:solidFill>
-                  <a:srgbClr val="FFFFFF"/>
-                </a:solidFill>
-                <a:latin typeface="Arial"/>
-              </a:rPr>
-              <a:t>ハレル - ヤ  我がすべて</a:t>
-            </a:r>
-          </a:p>
-        </p:txBody>
-      </p:sp>
-      <p:sp>
-        <p:nvSpPr>
-          <p:cNvPr id="6" name="TextBox 5"/>
-          <p:cNvSpPr txBox="1"/>
-          <p:nvPr/>
-        </p:nvSpPr>
-        <p:spPr>
-          <a:xfrm>
-            <a:off x="594360" y="4251960"/>
-            <a:ext cx="11002975" cy="384048"/>
-          </a:xfrm>
-          <a:prstGeom prst="rect">
-            <a:avLst/>
-          </a:prstGeom>
-          <a:noFill/>
-        </p:spPr>
-        <p:txBody>
-          <a:bodyPr wrap="square">
-            <a:spAutoFit/>
-          </a:bodyPr>
-          <a:lstStyle/>
-          <a:p>
-            <a:pPr algn="ctr"/>
-            <a:r>
-              <a:rPr sz="2400" b="0" i="1">
-                <a:solidFill>
-                  <a:srgbClr val="B4B4B4"/>
-                </a:solidFill>
-                <a:latin typeface="Arial"/>
-              </a:rPr>
-              <a:t>halleluya wa ga subete</a:t>
+                  <a:srgbClr val="828282"/>
+                </a:solidFill>
+                <a:latin typeface="Arial"/>
+              </a:rPr>
+              <a:t>Agora só conheço a graça</a:t>
             </a:r>
           </a:p>
         </p:txBody>
@@ -6068,8 +5298,8 @@
         </p:nvSpPr>
         <p:spPr>
           <a:xfrm>
-            <a:off x="594360" y="4672584"/>
-            <a:ext cx="11002975" cy="347472"/>
+            <a:off x="640080" y="4896612"/>
+            <a:ext cx="10911535" cy="310896"/>
           </a:xfrm>
           <a:prstGeom prst="rect">
             <a:avLst/>
@@ -6086,11 +5316,11 @@
             <a:r>
               <a:rPr sz="2000" b="0" i="1">
                 <a:solidFill>
-                  <a:srgbClr val="8C8C8C"/>
-                </a:solidFill>
-                <a:latin typeface="Arial"/>
-              </a:rPr>
-              <a:t/>
+                  <a:srgbClr val="828282"/>
+                </a:solidFill>
+                <a:latin typeface="Arial"/>
+              </a:rPr>
+              <a:t>Aleluia! Tudo que eu tenho é Cristo</a:t>
             </a:r>
           </a:p>
         </p:txBody>
@@ -6129,23 +5359,23 @@
         </p:nvSpPr>
         <p:spPr>
           <a:xfrm>
-            <a:off x="594360" y="1837944"/>
-            <a:ext cx="11002975" cy="685800"/>
-          </a:xfrm>
-          <a:prstGeom prst="rect">
-            <a:avLst/>
-          </a:prstGeom>
-          <a:noFill/>
-        </p:spPr>
-        <p:txBody>
-          <a:bodyPr wrap="square">
-            <a:spAutoFit/>
-          </a:bodyPr>
-          <a:lstStyle/>
-          <a:p>
-            <a:pPr algn="ctr"/>
-            <a:r>
-              <a:rPr sz="4400" b="1" i="0">
+            <a:off x="640080" y="1650492"/>
+            <a:ext cx="10911535" cy="731520"/>
+          </a:xfrm>
+          <a:prstGeom prst="rect">
+            <a:avLst/>
+          </a:prstGeom>
+          <a:noFill/>
+        </p:spPr>
+        <p:txBody>
+          <a:bodyPr wrap="square">
+            <a:spAutoFit/>
+          </a:bodyPr>
+          <a:lstStyle/>
+          <a:p>
+            <a:pPr algn="ctr"/>
+            <a:r>
+              <a:rPr sz="4800" b="1" i="0">
                 <a:solidFill>
                   <a:srgbClr val="FFFFFF"/>
                 </a:solidFill>
@@ -6164,8 +5394,8 @@
         </p:nvSpPr>
         <p:spPr>
           <a:xfrm>
-            <a:off x="594360" y="2560320"/>
-            <a:ext cx="11002975" cy="384048"/>
+            <a:off x="640080" y="2418588"/>
+            <a:ext cx="10911535" cy="365760"/>
           </a:xfrm>
           <a:prstGeom prst="rect">
             <a:avLst/>
@@ -6182,7 +5412,7 @@
             <a:r>
               <a:rPr sz="2400" b="0" i="1">
                 <a:solidFill>
-                  <a:srgbClr val="B4B4B4"/>
+                  <a:srgbClr val="AAAAAA"/>
                 </a:solidFill>
                 <a:latin typeface="Arial"/>
               </a:rPr>
@@ -6199,8 +5429,78 @@
         </p:nvSpPr>
         <p:spPr>
           <a:xfrm>
-            <a:off x="594360" y="2980944"/>
-            <a:ext cx="11002975" cy="347472"/>
+            <a:off x="640080" y="2985516"/>
+            <a:ext cx="10911535" cy="731520"/>
+          </a:xfrm>
+          <a:prstGeom prst="rect">
+            <a:avLst/>
+          </a:prstGeom>
+          <a:noFill/>
+        </p:spPr>
+        <p:txBody>
+          <a:bodyPr wrap="square">
+            <a:spAutoFit/>
+          </a:bodyPr>
+          <a:lstStyle/>
+          <a:p>
+            <a:pPr algn="ctr"/>
+            <a:r>
+              <a:rPr sz="4800" b="1" i="0">
+                <a:solidFill>
+                  <a:srgbClr val="FFFFFF"/>
+                </a:solidFill>
+                <a:latin typeface="Arial"/>
+              </a:rPr>
+              <a:t>ハレル - ヤ  我がいのち</a:t>
+            </a:r>
+          </a:p>
+        </p:txBody>
+      </p:sp>
+      <p:sp>
+        <p:nvSpPr>
+          <p:cNvPr id="5" name="TextBox 4"/>
+          <p:cNvSpPr txBox="1"/>
+          <p:nvPr/>
+        </p:nvSpPr>
+        <p:spPr>
+          <a:xfrm>
+            <a:off x="640080" y="3753612"/>
+            <a:ext cx="10911535" cy="365760"/>
+          </a:xfrm>
+          <a:prstGeom prst="rect">
+            <a:avLst/>
+          </a:prstGeom>
+          <a:noFill/>
+        </p:spPr>
+        <p:txBody>
+          <a:bodyPr wrap="square">
+            <a:spAutoFit/>
+          </a:bodyPr>
+          <a:lstStyle/>
+          <a:p>
+            <a:pPr algn="ctr"/>
+            <a:r>
+              <a:rPr sz="2400" b="0" i="1">
+                <a:solidFill>
+                  <a:srgbClr val="AAAAAA"/>
+                </a:solidFill>
+                <a:latin typeface="Arial"/>
+              </a:rPr>
+              <a:t>halleluya wa ga inochi</a:t>
+            </a:r>
+          </a:p>
+        </p:txBody>
+      </p:sp>
+      <p:sp>
+        <p:nvSpPr>
+          <p:cNvPr id="6" name="TextBox 5"/>
+          <p:cNvSpPr txBox="1"/>
+          <p:nvPr/>
+        </p:nvSpPr>
+        <p:spPr>
+          <a:xfrm>
+            <a:off x="640080" y="4530852"/>
+            <a:ext cx="10911535" cy="310896"/>
           </a:xfrm>
           <a:prstGeom prst="rect">
             <a:avLst/>
@@ -6217,81 +5517,11 @@
             <a:r>
               <a:rPr sz="2000" b="0" i="1">
                 <a:solidFill>
-                  <a:srgbClr val="8C8C8C"/>
-                </a:solidFill>
-                <a:latin typeface="Arial"/>
-              </a:rPr>
-              <a:t/>
-            </a:r>
-          </a:p>
-        </p:txBody>
-      </p:sp>
-      <p:sp>
-        <p:nvSpPr>
-          <p:cNvPr id="5" name="TextBox 4"/>
-          <p:cNvSpPr txBox="1"/>
-          <p:nvPr/>
-        </p:nvSpPr>
-        <p:spPr>
-          <a:xfrm>
-            <a:off x="594360" y="3529584"/>
-            <a:ext cx="11002975" cy="685800"/>
-          </a:xfrm>
-          <a:prstGeom prst="rect">
-            <a:avLst/>
-          </a:prstGeom>
-          <a:noFill/>
-        </p:spPr>
-        <p:txBody>
-          <a:bodyPr wrap="square">
-            <a:spAutoFit/>
-          </a:bodyPr>
-          <a:lstStyle/>
-          <a:p>
-            <a:pPr algn="ctr"/>
-            <a:r>
-              <a:rPr sz="4400" b="1" i="0">
-                <a:solidFill>
-                  <a:srgbClr val="FFFFFF"/>
-                </a:solidFill>
-                <a:latin typeface="Arial"/>
-              </a:rPr>
-              <a:t>ハレル - ヤ  我がいのち</a:t>
-            </a:r>
-          </a:p>
-        </p:txBody>
-      </p:sp>
-      <p:sp>
-        <p:nvSpPr>
-          <p:cNvPr id="6" name="TextBox 5"/>
-          <p:cNvSpPr txBox="1"/>
-          <p:nvPr/>
-        </p:nvSpPr>
-        <p:spPr>
-          <a:xfrm>
-            <a:off x="594360" y="4251960"/>
-            <a:ext cx="11002975" cy="384048"/>
-          </a:xfrm>
-          <a:prstGeom prst="rect">
-            <a:avLst/>
-          </a:prstGeom>
-          <a:noFill/>
-        </p:spPr>
-        <p:txBody>
-          <a:bodyPr wrap="square">
-            <a:spAutoFit/>
-          </a:bodyPr>
-          <a:lstStyle/>
-          <a:p>
-            <a:pPr algn="ctr"/>
-            <a:r>
-              <a:rPr sz="2400" b="0" i="1">
-                <a:solidFill>
-                  <a:srgbClr val="B4B4B4"/>
-                </a:solidFill>
-                <a:latin typeface="Arial"/>
-              </a:rPr>
-              <a:t>halleluya wa ga inochi</a:t>
+                  <a:srgbClr val="828282"/>
+                </a:solidFill>
+                <a:latin typeface="Arial"/>
+              </a:rPr>
+              <a:t>Aleluia! Jesus é meu</a:t>
             </a:r>
           </a:p>
         </p:txBody>
@@ -6304,8 +5534,8 @@
         </p:nvSpPr>
         <p:spPr>
           <a:xfrm>
-            <a:off x="594360" y="4672584"/>
-            <a:ext cx="11002975" cy="347472"/>
+            <a:off x="640080" y="4896612"/>
+            <a:ext cx="10911535" cy="310896"/>
           </a:xfrm>
           <a:prstGeom prst="rect">
             <a:avLst/>
@@ -6322,11 +5552,11 @@
             <a:r>
               <a:rPr sz="2000" b="0" i="1">
                 <a:solidFill>
-                  <a:srgbClr val="8C8C8C"/>
-                </a:solidFill>
-                <a:latin typeface="Arial"/>
-              </a:rPr>
-              <a:t/>
+                  <a:srgbClr val="828282"/>
+                </a:solidFill>
+                <a:latin typeface="Arial"/>
+              </a:rPr>
+              <a:t>Aleluia! Tudo que eu tenho é Cristo</a:t>
             </a:r>
           </a:p>
         </p:txBody>
@@ -6365,23 +5595,23 @@
         </p:nvSpPr>
         <p:spPr>
           <a:xfrm>
-            <a:off x="594360" y="2258568"/>
-            <a:ext cx="11002975" cy="685800"/>
-          </a:xfrm>
-          <a:prstGeom prst="rect">
-            <a:avLst/>
-          </a:prstGeom>
-          <a:noFill/>
-        </p:spPr>
-        <p:txBody>
-          <a:bodyPr wrap="square">
-            <a:spAutoFit/>
-          </a:bodyPr>
-          <a:lstStyle/>
-          <a:p>
-            <a:pPr algn="ctr"/>
-            <a:r>
-              <a:rPr sz="4400" b="1" i="0">
+            <a:off x="640080" y="2052828"/>
+            <a:ext cx="10911535" cy="731520"/>
+          </a:xfrm>
+          <a:prstGeom prst="rect">
+            <a:avLst/>
+          </a:prstGeom>
+          <a:noFill/>
+        </p:spPr>
+        <p:txBody>
+          <a:bodyPr wrap="square">
+            <a:spAutoFit/>
+          </a:bodyPr>
+          <a:lstStyle/>
+          <a:p>
+            <a:pPr algn="ctr"/>
+            <a:r>
+              <a:rPr sz="4800" b="1" i="0">
                 <a:solidFill>
                   <a:srgbClr val="FFFFFF"/>
                 </a:solidFill>
@@ -6400,99 +5630,29 @@
         </p:nvSpPr>
         <p:spPr>
           <a:xfrm>
-            <a:off x="594360" y="2980944"/>
-            <a:ext cx="11002975" cy="347472"/>
-          </a:xfrm>
-          <a:prstGeom prst="rect">
-            <a:avLst/>
-          </a:prstGeom>
-          <a:noFill/>
-        </p:spPr>
-        <p:txBody>
-          <a:bodyPr wrap="square">
-            <a:spAutoFit/>
-          </a:bodyPr>
-          <a:lstStyle/>
-          <a:p>
-            <a:pPr algn="ctr"/>
-            <a:r>
-              <a:rPr sz="2200" b="0" i="1">
-                <a:solidFill>
-                  <a:srgbClr val="8C8C8C"/>
-                </a:solidFill>
-                <a:latin typeface="Arial"/>
-              </a:rPr>
-              <a:t/>
-            </a:r>
-          </a:p>
-        </p:txBody>
-      </p:sp>
-      <p:sp>
-        <p:nvSpPr>
-          <p:cNvPr id="4" name="TextBox 3"/>
-          <p:cNvSpPr txBox="1"/>
-          <p:nvPr/>
-        </p:nvSpPr>
-        <p:spPr>
-          <a:xfrm>
-            <a:off x="594360" y="3529584"/>
-            <a:ext cx="11002975" cy="685800"/>
-          </a:xfrm>
-          <a:prstGeom prst="rect">
-            <a:avLst/>
-          </a:prstGeom>
-          <a:noFill/>
-        </p:spPr>
-        <p:txBody>
-          <a:bodyPr wrap="square">
-            <a:spAutoFit/>
-          </a:bodyPr>
-          <a:lstStyle/>
-          <a:p>
-            <a:pPr algn="ctr"/>
-            <a:r>
-              <a:rPr sz="3705" b="1" i="0">
+            <a:off x="640080" y="2985516"/>
+            <a:ext cx="10911535" cy="731520"/>
+          </a:xfrm>
+          <a:prstGeom prst="rect">
+            <a:avLst/>
+          </a:prstGeom>
+          <a:noFill/>
+        </p:spPr>
+        <p:txBody>
+          <a:bodyPr wrap="square">
+            <a:spAutoFit/>
+          </a:bodyPr>
+          <a:lstStyle/>
+          <a:p>
+            <a:pPr algn="ctr"/>
+            <a:r>
+              <a:rPr sz="4000" b="1" i="0">
                 <a:solidFill>
                   <a:srgbClr val="FFFFFF"/>
                 </a:solidFill>
                 <a:latin typeface="Arial"/>
               </a:rPr>
               <a:t>Eu estava perdido na mais escura noite</a:t>
-            </a:r>
-          </a:p>
-        </p:txBody>
-      </p:sp>
-      <p:sp>
-        <p:nvSpPr>
-          <p:cNvPr id="5" name="TextBox 4"/>
-          <p:cNvSpPr txBox="1"/>
-          <p:nvPr/>
-        </p:nvSpPr>
-        <p:spPr>
-          <a:xfrm>
-            <a:off x="594360" y="4251960"/>
-            <a:ext cx="11002975" cy="347472"/>
-          </a:xfrm>
-          <a:prstGeom prst="rect">
-            <a:avLst/>
-          </a:prstGeom>
-          <a:noFill/>
-        </p:spPr>
-        <p:txBody>
-          <a:bodyPr wrap="square">
-            <a:spAutoFit/>
-          </a:bodyPr>
-          <a:lstStyle/>
-          <a:p>
-            <a:pPr algn="ctr"/>
-            <a:r>
-              <a:rPr sz="2200" b="0" i="1">
-                <a:solidFill>
-                  <a:srgbClr val="8C8C8C"/>
-                </a:solidFill>
-                <a:latin typeface="Arial"/>
-              </a:rPr>
-              <a:t/>
             </a:r>
           </a:p>
         </p:txBody>
@@ -6531,23 +5691,23 @@
         </p:nvSpPr>
         <p:spPr>
           <a:xfrm>
-            <a:off x="594360" y="2258568"/>
-            <a:ext cx="11002975" cy="685800"/>
-          </a:xfrm>
-          <a:prstGeom prst="rect">
-            <a:avLst/>
-          </a:prstGeom>
-          <a:noFill/>
-        </p:spPr>
-        <p:txBody>
-          <a:bodyPr wrap="square">
-            <a:spAutoFit/>
-          </a:bodyPr>
-          <a:lstStyle/>
-          <a:p>
-            <a:pPr algn="ctr"/>
-            <a:r>
-              <a:rPr sz="4400" b="1" i="0">
+            <a:off x="640080" y="2052828"/>
+            <a:ext cx="10911535" cy="731520"/>
+          </a:xfrm>
+          <a:prstGeom prst="rect">
+            <a:avLst/>
+          </a:prstGeom>
+          <a:noFill/>
+        </p:spPr>
+        <p:txBody>
+          <a:bodyPr wrap="square">
+            <a:spAutoFit/>
+          </a:bodyPr>
+          <a:lstStyle/>
+          <a:p>
+            <a:pPr algn="ctr"/>
+            <a:r>
+              <a:rPr sz="4800" b="1" i="0">
                 <a:solidFill>
                   <a:srgbClr val="FFFFFF"/>
                 </a:solidFill>
@@ -6566,99 +5726,29 @@
         </p:nvSpPr>
         <p:spPr>
           <a:xfrm>
-            <a:off x="594360" y="2980944"/>
-            <a:ext cx="11002975" cy="347472"/>
-          </a:xfrm>
-          <a:prstGeom prst="rect">
-            <a:avLst/>
-          </a:prstGeom>
-          <a:noFill/>
-        </p:spPr>
-        <p:txBody>
-          <a:bodyPr wrap="square">
-            <a:spAutoFit/>
-          </a:bodyPr>
-          <a:lstStyle/>
-          <a:p>
-            <a:pPr algn="ctr"/>
-            <a:r>
-              <a:rPr sz="2200" b="0" i="1">
-                <a:solidFill>
-                  <a:srgbClr val="8C8C8C"/>
-                </a:solidFill>
-                <a:latin typeface="Arial"/>
-              </a:rPr>
-              <a:t/>
-            </a:r>
-          </a:p>
-        </p:txBody>
-      </p:sp>
-      <p:sp>
-        <p:nvSpPr>
-          <p:cNvPr id="4" name="TextBox 3"/>
-          <p:cNvSpPr txBox="1"/>
-          <p:nvPr/>
-        </p:nvSpPr>
-        <p:spPr>
-          <a:xfrm>
-            <a:off x="594360" y="3529584"/>
-            <a:ext cx="11002975" cy="685800"/>
-          </a:xfrm>
-          <a:prstGeom prst="rect">
-            <a:avLst/>
-          </a:prstGeom>
-          <a:noFill/>
-        </p:spPr>
-        <p:txBody>
-          <a:bodyPr wrap="square">
-            <a:spAutoFit/>
-          </a:bodyPr>
-          <a:lstStyle/>
-          <a:p>
-            <a:pPr algn="ctr"/>
-            <a:r>
-              <a:rPr sz="4400" b="1" i="0">
+            <a:off x="640080" y="2985516"/>
+            <a:ext cx="10911535" cy="731520"/>
+          </a:xfrm>
+          <a:prstGeom prst="rect">
+            <a:avLst/>
+          </a:prstGeom>
+          <a:noFill/>
+        </p:spPr>
+        <p:txBody>
+          <a:bodyPr wrap="square">
+            <a:spAutoFit/>
+          </a:bodyPr>
+          <a:lstStyle/>
+          <a:p>
+            <a:pPr algn="ctr"/>
+            <a:r>
+              <a:rPr sz="4800" b="1" i="0">
                 <a:solidFill>
                   <a:srgbClr val="FFFFFF"/>
                 </a:solidFill>
                 <a:latin typeface="Arial"/>
               </a:rPr>
               <a:t>O pecado prometia alegria e vida</a:t>
-            </a:r>
-          </a:p>
-        </p:txBody>
-      </p:sp>
-      <p:sp>
-        <p:nvSpPr>
-          <p:cNvPr id="5" name="TextBox 4"/>
-          <p:cNvSpPr txBox="1"/>
-          <p:nvPr/>
-        </p:nvSpPr>
-        <p:spPr>
-          <a:xfrm>
-            <a:off x="594360" y="4251960"/>
-            <a:ext cx="11002975" cy="347472"/>
-          </a:xfrm>
-          <a:prstGeom prst="rect">
-            <a:avLst/>
-          </a:prstGeom>
-          <a:noFill/>
-        </p:spPr>
-        <p:txBody>
-          <a:bodyPr wrap="square">
-            <a:spAutoFit/>
-          </a:bodyPr>
-          <a:lstStyle/>
-          <a:p>
-            <a:pPr algn="ctr"/>
-            <a:r>
-              <a:rPr sz="2200" b="0" i="1">
-                <a:solidFill>
-                  <a:srgbClr val="8C8C8C"/>
-                </a:solidFill>
-                <a:latin typeface="Arial"/>
-              </a:rPr>
-              <a:t/>
             </a:r>
           </a:p>
         </p:txBody>
@@ -6697,23 +5787,23 @@
         </p:nvSpPr>
         <p:spPr>
           <a:xfrm>
-            <a:off x="594360" y="2258568"/>
-            <a:ext cx="11002975" cy="685800"/>
-          </a:xfrm>
-          <a:prstGeom prst="rect">
-            <a:avLst/>
-          </a:prstGeom>
-          <a:noFill/>
-        </p:spPr>
-        <p:txBody>
-          <a:bodyPr wrap="square">
-            <a:spAutoFit/>
-          </a:bodyPr>
-          <a:lstStyle/>
-          <a:p>
-            <a:pPr algn="ctr"/>
-            <a:r>
-              <a:rPr sz="4400" b="1" i="0">
+            <a:off x="640080" y="2052828"/>
+            <a:ext cx="10911535" cy="731520"/>
+          </a:xfrm>
+          <a:prstGeom prst="rect">
+            <a:avLst/>
+          </a:prstGeom>
+          <a:noFill/>
+        </p:spPr>
+        <p:txBody>
+          <a:bodyPr wrap="square">
+            <a:spAutoFit/>
+          </a:bodyPr>
+          <a:lstStyle/>
+          <a:p>
+            <a:pPr algn="ctr"/>
+            <a:r>
+              <a:rPr sz="4800" b="1" i="0">
                 <a:solidFill>
                   <a:srgbClr val="FFFFFF"/>
                 </a:solidFill>
@@ -6732,99 +5822,29 @@
         </p:nvSpPr>
         <p:spPr>
           <a:xfrm>
-            <a:off x="594360" y="2980944"/>
-            <a:ext cx="11002975" cy="347472"/>
-          </a:xfrm>
-          <a:prstGeom prst="rect">
-            <a:avLst/>
-          </a:prstGeom>
-          <a:noFill/>
-        </p:spPr>
-        <p:txBody>
-          <a:bodyPr wrap="square">
-            <a:spAutoFit/>
-          </a:bodyPr>
-          <a:lstStyle/>
-          <a:p>
-            <a:pPr algn="ctr"/>
-            <a:r>
-              <a:rPr sz="2200" b="0" i="1">
-                <a:solidFill>
-                  <a:srgbClr val="8C8C8C"/>
-                </a:solidFill>
-                <a:latin typeface="Arial"/>
-              </a:rPr>
-              <a:t/>
-            </a:r>
-          </a:p>
-        </p:txBody>
-      </p:sp>
-      <p:sp>
-        <p:nvSpPr>
-          <p:cNvPr id="4" name="TextBox 3"/>
-          <p:cNvSpPr txBox="1"/>
-          <p:nvPr/>
-        </p:nvSpPr>
-        <p:spPr>
-          <a:xfrm>
-            <a:off x="594360" y="3529584"/>
-            <a:ext cx="11002975" cy="685800"/>
-          </a:xfrm>
-          <a:prstGeom prst="rect">
-            <a:avLst/>
-          </a:prstGeom>
-          <a:noFill/>
-        </p:spPr>
-        <p:txBody>
-          <a:bodyPr wrap="square">
-            <a:spAutoFit/>
-          </a:bodyPr>
-          <a:lstStyle/>
-          <a:p>
-            <a:pPr algn="ctr"/>
-            <a:r>
-              <a:rPr sz="3911" b="1" i="0">
+            <a:off x="640080" y="2985516"/>
+            <a:ext cx="10911535" cy="731520"/>
+          </a:xfrm>
+          <a:prstGeom prst="rect">
+            <a:avLst/>
+          </a:prstGeom>
+          <a:noFill/>
+        </p:spPr>
+        <p:txBody>
+          <a:bodyPr wrap="square">
+            <a:spAutoFit/>
+          </a:bodyPr>
+          <a:lstStyle/>
+          <a:p>
+            <a:pPr algn="ctr"/>
+            <a:r>
+              <a:rPr sz="4200" b="1" i="0">
                 <a:solidFill>
                   <a:srgbClr val="FFFFFF"/>
                 </a:solidFill>
                 <a:latin typeface="Arial"/>
               </a:rPr>
               <a:t>Não havia esperança, estava entregue</a:t>
-            </a:r>
-          </a:p>
-        </p:txBody>
-      </p:sp>
-      <p:sp>
-        <p:nvSpPr>
-          <p:cNvPr id="5" name="TextBox 4"/>
-          <p:cNvSpPr txBox="1"/>
-          <p:nvPr/>
-        </p:nvSpPr>
-        <p:spPr>
-          <a:xfrm>
-            <a:off x="594360" y="4251960"/>
-            <a:ext cx="11002975" cy="347472"/>
-          </a:xfrm>
-          <a:prstGeom prst="rect">
-            <a:avLst/>
-          </a:prstGeom>
-          <a:noFill/>
-        </p:spPr>
-        <p:txBody>
-          <a:bodyPr wrap="square">
-            <a:spAutoFit/>
-          </a:bodyPr>
-          <a:lstStyle/>
-          <a:p>
-            <a:pPr algn="ctr"/>
-            <a:r>
-              <a:rPr sz="2200" b="0" i="1">
-                <a:solidFill>
-                  <a:srgbClr val="8C8C8C"/>
-                </a:solidFill>
-                <a:latin typeface="Arial"/>
-              </a:rPr>
-              <a:t/>
             </a:r>
           </a:p>
         </p:txBody>

--- a/output_pptx/All_I_Have_Is_Christ.pptx
+++ b/output_pptx/All_I_Have_Is_Christ.pptx
@@ -3421,6 +3421,76 @@
           </a:p>
         </p:txBody>
       </p:sp>
+      <p:sp>
+        <p:nvSpPr>
+          <p:cNvPr id="4" name="TextBox 3"/>
+          <p:cNvSpPr txBox="1"/>
+          <p:nvPr/>
+        </p:nvSpPr>
+        <p:spPr>
+          <a:xfrm>
+            <a:off x="640080" y="4128516"/>
+            <a:ext cx="10911535" cy="310896"/>
+          </a:xfrm>
+          <a:prstGeom prst="rect">
+            <a:avLst/>
+          </a:prstGeom>
+          <a:noFill/>
+        </p:spPr>
+        <p:txBody>
+          <a:bodyPr wrap="square">
+            <a:spAutoFit/>
+          </a:bodyPr>
+          <a:lstStyle/>
+          <a:p>
+            <a:pPr algn="ctr"/>
+            <a:r>
+              <a:rPr sz="2000" b="0" i="0">
+                <a:solidFill>
+                  <a:srgbClr val="828282"/>
+                </a:solidFill>
+                <a:latin typeface="Arial"/>
+              </a:rPr>
+              <a:t>あなたの聖なる御心に逆らって</a:t>
+            </a:r>
+          </a:p>
+        </p:txBody>
+      </p:sp>
+      <p:sp>
+        <p:nvSpPr>
+          <p:cNvPr id="5" name="TextBox 4"/>
+          <p:cNvSpPr txBox="1"/>
+          <p:nvPr/>
+        </p:nvSpPr>
+        <p:spPr>
+          <a:xfrm>
+            <a:off x="640080" y="4494276"/>
+            <a:ext cx="10911535" cy="310896"/>
+          </a:xfrm>
+          <a:prstGeom prst="rect">
+            <a:avLst/>
+          </a:prstGeom>
+          <a:noFill/>
+        </p:spPr>
+        <p:txBody>
+          <a:bodyPr wrap="square">
+            <a:spAutoFit/>
+          </a:bodyPr>
+          <a:lstStyle/>
+          <a:p>
+            <a:pPr algn="ctr"/>
+            <a:r>
+              <a:rPr sz="2000" b="0" i="0">
+                <a:solidFill>
+                  <a:srgbClr val="828282"/>
+                </a:solidFill>
+                <a:latin typeface="Arial"/>
+              </a:rPr>
+              <a:t>もしあなたが私を最初に愛してくれなかったなら</a:t>
+            </a:r>
+          </a:p>
+        </p:txBody>
+      </p:sp>
     </p:spTree>
   </p:cSld>
   <p:clrMapOvr>
@@ -3517,6 +3587,76 @@
           </a:p>
         </p:txBody>
       </p:sp>
+      <p:sp>
+        <p:nvSpPr>
+          <p:cNvPr id="4" name="TextBox 3"/>
+          <p:cNvSpPr txBox="1"/>
+          <p:nvPr/>
+        </p:nvSpPr>
+        <p:spPr>
+          <a:xfrm>
+            <a:off x="640080" y="4128516"/>
+            <a:ext cx="10911535" cy="310896"/>
+          </a:xfrm>
+          <a:prstGeom prst="rect">
+            <a:avLst/>
+          </a:prstGeom>
+          <a:noFill/>
+        </p:spPr>
+        <p:txBody>
+          <a:bodyPr wrap="square">
+            <a:spAutoFit/>
+          </a:bodyPr>
+          <a:lstStyle/>
+          <a:p>
+            <a:pPr algn="ctr"/>
+            <a:r>
+              <a:rPr sz="2000" b="0" i="0">
+                <a:solidFill>
+                  <a:srgbClr val="828282"/>
+                </a:solidFill>
+                <a:latin typeface="Arial"/>
+              </a:rPr>
+              <a:t>私はあなたを拒み続けたでしょう</a:t>
+            </a:r>
+          </a:p>
+        </p:txBody>
+      </p:sp>
+      <p:sp>
+        <p:nvSpPr>
+          <p:cNvPr id="5" name="TextBox 4"/>
+          <p:cNvSpPr txBox="1"/>
+          <p:nvPr/>
+        </p:nvSpPr>
+        <p:spPr>
+          <a:xfrm>
+            <a:off x="640080" y="4494276"/>
+            <a:ext cx="10911535" cy="310896"/>
+          </a:xfrm>
+          <a:prstGeom prst="rect">
+            <a:avLst/>
+          </a:prstGeom>
+          <a:noFill/>
+        </p:spPr>
+        <p:txBody>
+          <a:bodyPr wrap="square">
+            <a:spAutoFit/>
+          </a:bodyPr>
+          <a:lstStyle/>
+          <a:p>
+            <a:pPr algn="ctr"/>
+            <a:r>
+              <a:rPr sz="2000" b="0" i="0">
+                <a:solidFill>
+                  <a:srgbClr val="828282"/>
+                </a:solidFill>
+                <a:latin typeface="Arial"/>
+              </a:rPr>
+              <a:t>しかし私が滅びに向かって走っていた時</a:t>
+            </a:r>
+          </a:p>
+        </p:txBody>
+      </p:sp>
     </p:spTree>
   </p:cSld>
   <p:clrMapOvr>
@@ -3613,6 +3753,76 @@
           </a:p>
         </p:txBody>
       </p:sp>
+      <p:sp>
+        <p:nvSpPr>
+          <p:cNvPr id="4" name="TextBox 3"/>
+          <p:cNvSpPr txBox="1"/>
+          <p:nvPr/>
+        </p:nvSpPr>
+        <p:spPr>
+          <a:xfrm>
+            <a:off x="640080" y="4128516"/>
+            <a:ext cx="10911535" cy="310896"/>
+          </a:xfrm>
+          <a:prstGeom prst="rect">
+            <a:avLst/>
+          </a:prstGeom>
+          <a:noFill/>
+        </p:spPr>
+        <p:txBody>
+          <a:bodyPr wrap="square">
+            <a:spAutoFit/>
+          </a:bodyPr>
+          <a:lstStyle/>
+          <a:p>
+            <a:pPr algn="ctr"/>
+            <a:r>
+              <a:rPr sz="2000" b="0" i="0">
+                <a:solidFill>
+                  <a:srgbClr val="828282"/>
+                </a:solidFill>
+                <a:latin typeface="Arial"/>
+              </a:rPr>
+              <a:t>その代価に無関心でした</a:t>
+            </a:r>
+          </a:p>
+        </p:txBody>
+      </p:sp>
+      <p:sp>
+        <p:nvSpPr>
+          <p:cNvPr id="5" name="TextBox 4"/>
+          <p:cNvSpPr txBox="1"/>
+          <p:nvPr/>
+        </p:nvSpPr>
+        <p:spPr>
+          <a:xfrm>
+            <a:off x="640080" y="4494276"/>
+            <a:ext cx="10911535" cy="310896"/>
+          </a:xfrm>
+          <a:prstGeom prst="rect">
+            <a:avLst/>
+          </a:prstGeom>
+          <a:noFill/>
+        </p:spPr>
+        <p:txBody>
+          <a:bodyPr wrap="square">
+            <a:spAutoFit/>
+          </a:bodyPr>
+          <a:lstStyle/>
+          <a:p>
+            <a:pPr algn="ctr"/>
+            <a:r>
+              <a:rPr sz="2000" b="0" i="0">
+                <a:solidFill>
+                  <a:srgbClr val="828282"/>
+                </a:solidFill>
+                <a:latin typeface="Arial"/>
+              </a:rPr>
+              <a:t>あなたは私の無防備な状態を見つめ</a:t>
+            </a:r>
+          </a:p>
+        </p:txBody>
+      </p:sp>
     </p:spTree>
   </p:cSld>
   <p:clrMapOvr>
@@ -3709,6 +3919,76 @@
           </a:p>
         </p:txBody>
       </p:sp>
+      <p:sp>
+        <p:nvSpPr>
+          <p:cNvPr id="4" name="TextBox 3"/>
+          <p:cNvSpPr txBox="1"/>
+          <p:nvPr/>
+        </p:nvSpPr>
+        <p:spPr>
+          <a:xfrm>
+            <a:off x="640080" y="4128516"/>
+            <a:ext cx="10911535" cy="310896"/>
+          </a:xfrm>
+          <a:prstGeom prst="rect">
+            <a:avLst/>
+          </a:prstGeom>
+          <a:noFill/>
+        </p:spPr>
+        <p:txBody>
+          <a:bodyPr wrap="square">
+            <a:spAutoFit/>
+          </a:bodyPr>
+          <a:lstStyle/>
+          <a:p>
+            <a:pPr algn="ctr"/>
+            <a:r>
+              <a:rPr sz="2000" b="0" i="0">
+                <a:solidFill>
+                  <a:srgbClr val="828282"/>
+                </a:solidFill>
+                <a:latin typeface="Arial"/>
+              </a:rPr>
+              <a:t>私を十字架へ導きました</a:t>
+            </a:r>
+          </a:p>
+        </p:txBody>
+      </p:sp>
+      <p:sp>
+        <p:nvSpPr>
+          <p:cNvPr id="5" name="TextBox 4"/>
+          <p:cNvSpPr txBox="1"/>
+          <p:nvPr/>
+        </p:nvSpPr>
+        <p:spPr>
+          <a:xfrm>
+            <a:off x="640080" y="4494276"/>
+            <a:ext cx="10911535" cy="310896"/>
+          </a:xfrm>
+          <a:prstGeom prst="rect">
+            <a:avLst/>
+          </a:prstGeom>
+          <a:noFill/>
+        </p:spPr>
+        <p:txBody>
+          <a:bodyPr wrap="square">
+            <a:spAutoFit/>
+          </a:bodyPr>
+          <a:lstStyle/>
+          <a:p>
+            <a:pPr algn="ctr"/>
+            <a:r>
+              <a:rPr sz="2000" b="0" i="0">
+                <a:solidFill>
+                  <a:srgbClr val="828282"/>
+                </a:solidFill>
+                <a:latin typeface="Arial"/>
+              </a:rPr>
+              <a:t>そして神の愛が啓示されるのを見ました</a:t>
+            </a:r>
+          </a:p>
+        </p:txBody>
+      </p:sp>
     </p:spTree>
   </p:cSld>
   <p:clrMapOvr>
@@ -3805,6 +4085,76 @@
           </a:p>
         </p:txBody>
       </p:sp>
+      <p:sp>
+        <p:nvSpPr>
+          <p:cNvPr id="4" name="TextBox 3"/>
+          <p:cNvSpPr txBox="1"/>
+          <p:nvPr/>
+        </p:nvSpPr>
+        <p:spPr>
+          <a:xfrm>
+            <a:off x="640080" y="4128516"/>
+            <a:ext cx="10911535" cy="310896"/>
+          </a:xfrm>
+          <a:prstGeom prst="rect">
+            <a:avLst/>
+          </a:prstGeom>
+          <a:noFill/>
+        </p:spPr>
+        <p:txBody>
+          <a:bodyPr wrap="square">
+            <a:spAutoFit/>
+          </a:bodyPr>
+          <a:lstStyle/>
+          <a:p>
+            <a:pPr algn="ctr"/>
+            <a:r>
+              <a:rPr sz="2000" b="0" i="0">
+                <a:solidFill>
+                  <a:srgbClr val="828282"/>
+                </a:solidFill>
+                <a:latin typeface="Arial"/>
+              </a:rPr>
+              <a:t>あなたは私の代わりに苦しまれました</a:t>
+            </a:r>
+          </a:p>
+        </p:txBody>
+      </p:sp>
+      <p:sp>
+        <p:nvSpPr>
+          <p:cNvPr id="5" name="TextBox 4"/>
+          <p:cNvSpPr txBox="1"/>
+          <p:nvPr/>
+        </p:nvSpPr>
+        <p:spPr>
+          <a:xfrm>
+            <a:off x="640080" y="4494276"/>
+            <a:ext cx="10911535" cy="310896"/>
+          </a:xfrm>
+          <a:prstGeom prst="rect">
+            <a:avLst/>
+          </a:prstGeom>
+          <a:noFill/>
+        </p:spPr>
+        <p:txBody>
+          <a:bodyPr wrap="square">
+            <a:spAutoFit/>
+          </a:bodyPr>
+          <a:lstStyle/>
+          <a:p>
+            <a:pPr algn="ctr"/>
+            <a:r>
+              <a:rPr sz="2000" b="0" i="0">
+                <a:solidFill>
+                  <a:srgbClr val="828282"/>
+                </a:solidFill>
+                <a:latin typeface="Arial"/>
+              </a:rPr>
+              <a:t>私のために取り置かれた怒りに耐えられました</a:t>
+            </a:r>
+          </a:p>
+        </p:txBody>
+      </p:sp>
     </p:spTree>
   </p:cSld>
   <p:clrMapOvr>
@@ -3901,6 +4251,76 @@
           </a:p>
         </p:txBody>
       </p:sp>
+      <p:sp>
+        <p:nvSpPr>
+          <p:cNvPr id="4" name="TextBox 3"/>
+          <p:cNvSpPr txBox="1"/>
+          <p:nvPr/>
+        </p:nvSpPr>
+        <p:spPr>
+          <a:xfrm>
+            <a:off x="640080" y="4128516"/>
+            <a:ext cx="10911535" cy="310896"/>
+          </a:xfrm>
+          <a:prstGeom prst="rect">
+            <a:avLst/>
+          </a:prstGeom>
+          <a:noFill/>
+        </p:spPr>
+        <p:txBody>
+          <a:bodyPr wrap="square">
+            <a:spAutoFit/>
+          </a:bodyPr>
+          <a:lstStyle/>
+          <a:p>
+            <a:pPr algn="ctr"/>
+            <a:r>
+              <a:rPr sz="2000" b="0" i="0">
+                <a:solidFill>
+                  <a:srgbClr val="828282"/>
+                </a:solidFill>
+                <a:latin typeface="Arial"/>
+              </a:rPr>
+              <a:t>今、私は恵みだけを知っています</a:t>
+            </a:r>
+          </a:p>
+        </p:txBody>
+      </p:sp>
+      <p:sp>
+        <p:nvSpPr>
+          <p:cNvPr id="5" name="TextBox 4"/>
+          <p:cNvSpPr txBox="1"/>
+          <p:nvPr/>
+        </p:nvSpPr>
+        <p:spPr>
+          <a:xfrm>
+            <a:off x="640080" y="4494276"/>
+            <a:ext cx="10911535" cy="310896"/>
+          </a:xfrm>
+          <a:prstGeom prst="rect">
+            <a:avLst/>
+          </a:prstGeom>
+          <a:noFill/>
+        </p:spPr>
+        <p:txBody>
+          <a:bodyPr wrap="square">
+            <a:spAutoFit/>
+          </a:bodyPr>
+          <a:lstStyle/>
+          <a:p>
+            <a:pPr algn="ctr"/>
+            <a:r>
+              <a:rPr sz="2000" b="0" i="0">
+                <a:solidFill>
+                  <a:srgbClr val="828282"/>
+                </a:solidFill>
+                <a:latin typeface="Arial"/>
+              </a:rPr>
+              <a:t>ハレルヤ！私が持つすべてはキリスト</a:t>
+            </a:r>
+          </a:p>
+        </p:txBody>
+      </p:sp>
     </p:spTree>
   </p:cSld>
   <p:clrMapOvr>
@@ -3997,6 +4417,76 @@
           </a:p>
         </p:txBody>
       </p:sp>
+      <p:sp>
+        <p:nvSpPr>
+          <p:cNvPr id="4" name="TextBox 3"/>
+          <p:cNvSpPr txBox="1"/>
+          <p:nvPr/>
+        </p:nvSpPr>
+        <p:spPr>
+          <a:xfrm>
+            <a:off x="640080" y="4128516"/>
+            <a:ext cx="10911535" cy="310896"/>
+          </a:xfrm>
+          <a:prstGeom prst="rect">
+            <a:avLst/>
+          </a:prstGeom>
+          <a:noFill/>
+        </p:spPr>
+        <p:txBody>
+          <a:bodyPr wrap="square">
+            <a:spAutoFit/>
+          </a:bodyPr>
+          <a:lstStyle/>
+          <a:p>
+            <a:pPr algn="ctr"/>
+            <a:r>
+              <a:rPr sz="2000" b="0" i="0">
+                <a:solidFill>
+                  <a:srgbClr val="828282"/>
+                </a:solidFill>
+                <a:latin typeface="Arial"/>
+              </a:rPr>
+              <a:t>ハレルヤ！イエスは私のもの</a:t>
+            </a:r>
+          </a:p>
+        </p:txBody>
+      </p:sp>
+      <p:sp>
+        <p:nvSpPr>
+          <p:cNvPr id="5" name="TextBox 4"/>
+          <p:cNvSpPr txBox="1"/>
+          <p:nvPr/>
+        </p:nvSpPr>
+        <p:spPr>
+          <a:xfrm>
+            <a:off x="640080" y="4494276"/>
+            <a:ext cx="10911535" cy="310896"/>
+          </a:xfrm>
+          <a:prstGeom prst="rect">
+            <a:avLst/>
+          </a:prstGeom>
+          <a:noFill/>
+        </p:spPr>
+        <p:txBody>
+          <a:bodyPr wrap="square">
+            <a:spAutoFit/>
+          </a:bodyPr>
+          <a:lstStyle/>
+          <a:p>
+            <a:pPr algn="ctr"/>
+            <a:r>
+              <a:rPr sz="2000" b="0" i="0">
+                <a:solidFill>
+                  <a:srgbClr val="828282"/>
+                </a:solidFill>
+                <a:latin typeface="Arial"/>
+              </a:rPr>
+              <a:t>ハレルヤ！私が持つすべてはキリスト</a:t>
+            </a:r>
+          </a:p>
+        </p:txBody>
+      </p:sp>
     </p:spTree>
   </p:cSld>
   <p:clrMapOvr>
@@ -4093,6 +4583,76 @@
           </a:p>
         </p:txBody>
       </p:sp>
+      <p:sp>
+        <p:nvSpPr>
+          <p:cNvPr id="4" name="TextBox 3"/>
+          <p:cNvSpPr txBox="1"/>
+          <p:nvPr/>
+        </p:nvSpPr>
+        <p:spPr>
+          <a:xfrm>
+            <a:off x="640080" y="4128516"/>
+            <a:ext cx="10911535" cy="310896"/>
+          </a:xfrm>
+          <a:prstGeom prst="rect">
+            <a:avLst/>
+          </a:prstGeom>
+          <a:noFill/>
+        </p:spPr>
+        <p:txBody>
+          <a:bodyPr wrap="square">
+            <a:spAutoFit/>
+          </a:bodyPr>
+          <a:lstStyle/>
+          <a:p>
+            <a:pPr algn="ctr"/>
+            <a:r>
+              <a:rPr sz="2000" b="0" i="0">
+                <a:solidFill>
+                  <a:srgbClr val="828282"/>
+                </a:solidFill>
+                <a:latin typeface="Arial"/>
+              </a:rPr>
+              <a:t>そして今、主よ、あなたの恵みが勝利します</a:t>
+            </a:r>
+          </a:p>
+        </p:txBody>
+      </p:sp>
+      <p:sp>
+        <p:nvSpPr>
+          <p:cNvPr id="5" name="TextBox 4"/>
+          <p:cNvSpPr txBox="1"/>
+          <p:nvPr/>
+        </p:nvSpPr>
+        <p:spPr>
+          <a:xfrm>
+            <a:off x="640080" y="4494276"/>
+            <a:ext cx="10911535" cy="310896"/>
+          </a:xfrm>
+          <a:prstGeom prst="rect">
+            <a:avLst/>
+          </a:prstGeom>
+          <a:noFill/>
+        </p:spPr>
+        <p:txBody>
+          <a:bodyPr wrap="square">
+            <a:spAutoFit/>
+          </a:bodyPr>
+          <a:lstStyle/>
+          <a:p>
+            <a:pPr algn="ctr"/>
+            <a:r>
+              <a:rPr sz="2000" b="0" i="0">
+                <a:solidFill>
+                  <a:srgbClr val="828282"/>
+                </a:solidFill>
+                <a:latin typeface="Arial"/>
+              </a:rPr>
+              <a:t>前に私を縛っていたすべてのもの</a:t>
+            </a:r>
+          </a:p>
+        </p:txBody>
+      </p:sp>
     </p:spTree>
   </p:cSld>
   <p:clrMapOvr>
@@ -4189,6 +4749,76 @@
           </a:p>
         </p:txBody>
       </p:sp>
+      <p:sp>
+        <p:nvSpPr>
+          <p:cNvPr id="4" name="TextBox 3"/>
+          <p:cNvSpPr txBox="1"/>
+          <p:nvPr/>
+        </p:nvSpPr>
+        <p:spPr>
+          <a:xfrm>
+            <a:off x="640080" y="4128516"/>
+            <a:ext cx="10911535" cy="310896"/>
+          </a:xfrm>
+          <a:prstGeom prst="rect">
+            <a:avLst/>
+          </a:prstGeom>
+          <a:noFill/>
+        </p:spPr>
+        <p:txBody>
+          <a:bodyPr wrap="square">
+            <a:spAutoFit/>
+          </a:bodyPr>
+          <a:lstStyle/>
+          <a:p>
+            <a:pPr algn="ctr"/>
+            <a:r>
+              <a:rPr sz="2000" b="0" i="0">
+                <a:solidFill>
+                  <a:srgbClr val="828282"/>
+                </a:solidFill>
+                <a:latin typeface="Arial"/>
+              </a:rPr>
+              <a:t>私の心には他の望みはありません</a:t>
+            </a:r>
+          </a:p>
+        </p:txBody>
+      </p:sp>
+      <p:sp>
+        <p:nvSpPr>
+          <p:cNvPr id="5" name="TextBox 4"/>
+          <p:cNvSpPr txBox="1"/>
+          <p:nvPr/>
+        </p:nvSpPr>
+        <p:spPr>
+          <a:xfrm>
+            <a:off x="640080" y="4494276"/>
+            <a:ext cx="10911535" cy="310896"/>
+          </a:xfrm>
+          <a:prstGeom prst="rect">
+            <a:avLst/>
+          </a:prstGeom>
+          <a:noFill/>
+        </p:spPr>
+        <p:txBody>
+          <a:bodyPr wrap="square">
+            <a:spAutoFit/>
+          </a:bodyPr>
+          <a:lstStyle/>
+          <a:p>
+            <a:pPr algn="ctr"/>
+            <a:r>
+              <a:rPr sz="2000" b="0" i="0">
+                <a:solidFill>
+                  <a:srgbClr val="828282"/>
+                </a:solidFill>
+                <a:latin typeface="Arial"/>
+              </a:rPr>
+              <a:t>ただ永遠にあなたの中にいること以外</a:t>
+            </a:r>
+          </a:p>
+        </p:txBody>
+      </p:sp>
     </p:spTree>
   </p:cSld>
   <p:clrMapOvr>
@@ -4285,6 +4915,76 @@
           </a:p>
         </p:txBody>
       </p:sp>
+      <p:sp>
+        <p:nvSpPr>
+          <p:cNvPr id="4" name="TextBox 3"/>
+          <p:cNvSpPr txBox="1"/>
+          <p:nvPr/>
+        </p:nvSpPr>
+        <p:spPr>
+          <a:xfrm>
+            <a:off x="640080" y="4128516"/>
+            <a:ext cx="10911535" cy="310896"/>
+          </a:xfrm>
+          <a:prstGeom prst="rect">
+            <a:avLst/>
+          </a:prstGeom>
+          <a:noFill/>
+        </p:spPr>
+        <p:txBody>
+          <a:bodyPr wrap="square">
+            <a:spAutoFit/>
+          </a:bodyPr>
+          <a:lstStyle/>
+          <a:p>
+            <a:pPr algn="ctr"/>
+            <a:r>
+              <a:rPr sz="2000" b="0" i="0">
+                <a:solidFill>
+                  <a:srgbClr val="828282"/>
+                </a:solidFill>
+                <a:latin typeface="Arial"/>
+              </a:rPr>
+              <a:t>そして今、主よ、あなたの恵みが勝利します</a:t>
+            </a:r>
+          </a:p>
+        </p:txBody>
+      </p:sp>
+      <p:sp>
+        <p:nvSpPr>
+          <p:cNvPr id="5" name="TextBox 4"/>
+          <p:cNvSpPr txBox="1"/>
+          <p:nvPr/>
+        </p:nvSpPr>
+        <p:spPr>
+          <a:xfrm>
+            <a:off x="640080" y="4494276"/>
+            <a:ext cx="10911535" cy="310896"/>
+          </a:xfrm>
+          <a:prstGeom prst="rect">
+            <a:avLst/>
+          </a:prstGeom>
+          <a:noFill/>
+        </p:spPr>
+        <p:txBody>
+          <a:bodyPr wrap="square">
+            <a:spAutoFit/>
+          </a:bodyPr>
+          <a:lstStyle/>
+          <a:p>
+            <a:pPr algn="ctr"/>
+            <a:r>
+              <a:rPr sz="2000" b="0" i="0">
+                <a:solidFill>
+                  <a:srgbClr val="828282"/>
+                </a:solidFill>
+                <a:latin typeface="Arial"/>
+              </a:rPr>
+              <a:t>前に私を縛っていたすべてのもの</a:t>
+            </a:r>
+          </a:p>
+        </p:txBody>
+      </p:sp>
     </p:spTree>
   </p:cSld>
   <p:clrMapOvr>
@@ -4617,6 +5317,76 @@
           </a:p>
         </p:txBody>
       </p:sp>
+      <p:sp>
+        <p:nvSpPr>
+          <p:cNvPr id="4" name="TextBox 3"/>
+          <p:cNvSpPr txBox="1"/>
+          <p:nvPr/>
+        </p:nvSpPr>
+        <p:spPr>
+          <a:xfrm>
+            <a:off x="640080" y="4128516"/>
+            <a:ext cx="10911535" cy="310896"/>
+          </a:xfrm>
+          <a:prstGeom prst="rect">
+            <a:avLst/>
+          </a:prstGeom>
+          <a:noFill/>
+        </p:spPr>
+        <p:txBody>
+          <a:bodyPr wrap="square">
+            <a:spAutoFit/>
+          </a:bodyPr>
+          <a:lstStyle/>
+          <a:p>
+            <a:pPr algn="ctr"/>
+            <a:r>
+              <a:rPr sz="2000" b="0" i="0">
+                <a:solidFill>
+                  <a:srgbClr val="828282"/>
+                </a:solidFill>
+                <a:latin typeface="Arial"/>
+              </a:rPr>
+              <a:t>私の心には他の望みはありません</a:t>
+            </a:r>
+          </a:p>
+        </p:txBody>
+      </p:sp>
+      <p:sp>
+        <p:nvSpPr>
+          <p:cNvPr id="5" name="TextBox 4"/>
+          <p:cNvSpPr txBox="1"/>
+          <p:nvPr/>
+        </p:nvSpPr>
+        <p:spPr>
+          <a:xfrm>
+            <a:off x="640080" y="4494276"/>
+            <a:ext cx="10911535" cy="310896"/>
+          </a:xfrm>
+          <a:prstGeom prst="rect">
+            <a:avLst/>
+          </a:prstGeom>
+          <a:noFill/>
+        </p:spPr>
+        <p:txBody>
+          <a:bodyPr wrap="square">
+            <a:spAutoFit/>
+          </a:bodyPr>
+          <a:lstStyle/>
+          <a:p>
+            <a:pPr algn="ctr"/>
+            <a:r>
+              <a:rPr sz="2000" b="0" i="0">
+                <a:solidFill>
+                  <a:srgbClr val="828282"/>
+                </a:solidFill>
+                <a:latin typeface="Arial"/>
+              </a:rPr>
+              <a:t>ただ永遠にあなたの中にいること以外</a:t>
+            </a:r>
+          </a:p>
+        </p:txBody>
+      </p:sp>
     </p:spTree>
   </p:cSld>
   <p:clrMapOvr>
@@ -5657,6 +6427,76 @@
           </a:p>
         </p:txBody>
       </p:sp>
+      <p:sp>
+        <p:nvSpPr>
+          <p:cNvPr id="4" name="TextBox 3"/>
+          <p:cNvSpPr txBox="1"/>
+          <p:nvPr/>
+        </p:nvSpPr>
+        <p:spPr>
+          <a:xfrm>
+            <a:off x="640080" y="4128516"/>
+            <a:ext cx="10911535" cy="310896"/>
+          </a:xfrm>
+          <a:prstGeom prst="rect">
+            <a:avLst/>
+          </a:prstGeom>
+          <a:noFill/>
+        </p:spPr>
+        <p:txBody>
+          <a:bodyPr wrap="square">
+            <a:spAutoFit/>
+          </a:bodyPr>
+          <a:lstStyle/>
+          <a:p>
+            <a:pPr algn="ctr"/>
+            <a:r>
+              <a:rPr sz="2000" b="0" i="0">
+                <a:solidFill>
+                  <a:srgbClr val="828282"/>
+                </a:solidFill>
+                <a:latin typeface="Arial"/>
+              </a:rPr>
+              <a:t>私が持つすべてはキリスト</a:t>
+            </a:r>
+          </a:p>
+        </p:txBody>
+      </p:sp>
+      <p:sp>
+        <p:nvSpPr>
+          <p:cNvPr id="5" name="TextBox 4"/>
+          <p:cNvSpPr txBox="1"/>
+          <p:nvPr/>
+        </p:nvSpPr>
+        <p:spPr>
+          <a:xfrm>
+            <a:off x="640080" y="4494276"/>
+            <a:ext cx="10911535" cy="310896"/>
+          </a:xfrm>
+          <a:prstGeom prst="rect">
+            <a:avLst/>
+          </a:prstGeom>
+          <a:noFill/>
+        </p:spPr>
+        <p:txBody>
+          <a:bodyPr wrap="square">
+            <a:spAutoFit/>
+          </a:bodyPr>
+          <a:lstStyle/>
+          <a:p>
+            <a:pPr algn="ctr"/>
+            <a:r>
+              <a:rPr sz="2000" b="0" i="0">
+                <a:solidFill>
+                  <a:srgbClr val="828282"/>
+                </a:solidFill>
+                <a:latin typeface="Arial"/>
+              </a:rPr>
+              <a:t>私は最も暗い夜の中で迷っていました</a:t>
+            </a:r>
+          </a:p>
+        </p:txBody>
+      </p:sp>
     </p:spTree>
   </p:cSld>
   <p:clrMapOvr>
@@ -5753,6 +6593,76 @@
           </a:p>
         </p:txBody>
       </p:sp>
+      <p:sp>
+        <p:nvSpPr>
+          <p:cNvPr id="4" name="TextBox 3"/>
+          <p:cNvSpPr txBox="1"/>
+          <p:nvPr/>
+        </p:nvSpPr>
+        <p:spPr>
+          <a:xfrm>
+            <a:off x="640080" y="4128516"/>
+            <a:ext cx="10911535" cy="310896"/>
+          </a:xfrm>
+          <a:prstGeom prst="rect">
+            <a:avLst/>
+          </a:prstGeom>
+          <a:noFill/>
+        </p:spPr>
+        <p:txBody>
+          <a:bodyPr wrap="square">
+            <a:spAutoFit/>
+          </a:bodyPr>
+          <a:lstStyle/>
+          <a:p>
+            <a:pPr algn="ctr"/>
+            <a:r>
+              <a:rPr sz="2000" b="0" i="0">
+                <a:solidFill>
+                  <a:srgbClr val="828282"/>
+                </a:solidFill>
+                <a:latin typeface="Arial"/>
+              </a:rPr>
+              <a:t>しかし自分は道を知っていると思っていました</a:t>
+            </a:r>
+          </a:p>
+        </p:txBody>
+      </p:sp>
+      <p:sp>
+        <p:nvSpPr>
+          <p:cNvPr id="5" name="TextBox 4"/>
+          <p:cNvSpPr txBox="1"/>
+          <p:nvPr/>
+        </p:nvSpPr>
+        <p:spPr>
+          <a:xfrm>
+            <a:off x="640080" y="4494276"/>
+            <a:ext cx="10911535" cy="310896"/>
+          </a:xfrm>
+          <a:prstGeom prst="rect">
+            <a:avLst/>
+          </a:prstGeom>
+          <a:noFill/>
+        </p:spPr>
+        <p:txBody>
+          <a:bodyPr wrap="square">
+            <a:spAutoFit/>
+          </a:bodyPr>
+          <a:lstStyle/>
+          <a:p>
+            <a:pPr algn="ctr"/>
+            <a:r>
+              <a:rPr sz="2000" b="0" i="0">
+                <a:solidFill>
+                  <a:srgbClr val="828282"/>
+                </a:solidFill>
+                <a:latin typeface="Arial"/>
+              </a:rPr>
+              <a:t>罪は喜びと命を約束しました</a:t>
+            </a:r>
+          </a:p>
+        </p:txBody>
+      </p:sp>
     </p:spTree>
   </p:cSld>
   <p:clrMapOvr>
@@ -5845,6 +6755,76 @@
                 <a:latin typeface="Arial"/>
               </a:rPr>
               <a:t>Não havia esperança, estava entregue</a:t>
+            </a:r>
+          </a:p>
+        </p:txBody>
+      </p:sp>
+      <p:sp>
+        <p:nvSpPr>
+          <p:cNvPr id="4" name="TextBox 3"/>
+          <p:cNvSpPr txBox="1"/>
+          <p:nvPr/>
+        </p:nvSpPr>
+        <p:spPr>
+          <a:xfrm>
+            <a:off x="640080" y="4128516"/>
+            <a:ext cx="10911535" cy="310896"/>
+          </a:xfrm>
+          <a:prstGeom prst="rect">
+            <a:avLst/>
+          </a:prstGeom>
+          <a:noFill/>
+        </p:spPr>
+        <p:txBody>
+          <a:bodyPr wrap="square">
+            <a:spAutoFit/>
+          </a:bodyPr>
+          <a:lstStyle/>
+          <a:p>
+            <a:pPr algn="ctr"/>
+            <a:r>
+              <a:rPr sz="2000" b="0" i="0">
+                <a:solidFill>
+                  <a:srgbClr val="828282"/>
+                </a:solidFill>
+                <a:latin typeface="Arial"/>
+              </a:rPr>
+              <a:t>しかし私を墓へ導きました</a:t>
+            </a:r>
+          </a:p>
+        </p:txBody>
+      </p:sp>
+      <p:sp>
+        <p:nvSpPr>
+          <p:cNvPr id="5" name="TextBox 4"/>
+          <p:cNvSpPr txBox="1"/>
+          <p:nvPr/>
+        </p:nvSpPr>
+        <p:spPr>
+          <a:xfrm>
+            <a:off x="640080" y="4494276"/>
+            <a:ext cx="10911535" cy="310896"/>
+          </a:xfrm>
+          <a:prstGeom prst="rect">
+            <a:avLst/>
+          </a:prstGeom>
+          <a:noFill/>
+        </p:spPr>
+        <p:txBody>
+          <a:bodyPr wrap="square">
+            <a:spAutoFit/>
+          </a:bodyPr>
+          <a:lstStyle/>
+          <a:p>
+            <a:pPr algn="ctr"/>
+            <a:r>
+              <a:rPr sz="2000" b="0" i="0">
+                <a:solidFill>
+                  <a:srgbClr val="828282"/>
+                </a:solidFill>
+                <a:latin typeface="Arial"/>
+              </a:rPr>
+              <a:t>希望はなく、私は絶望していました</a:t>
             </a:r>
           </a:p>
         </p:txBody>
